--- a/demo/StudyTrack_DevOps_Capstone_Presentation.pptx
+++ b/demo/StudyTrack_DevOps_Capstone_Presentation.pptx
@@ -13,6 +13,7 @@
     <p:sldId id="261" r:id="rId12"/>
     <p:sldId id="262" r:id="rId13"/>
     <p:sldId id="263" r:id="rId14"/>
+    <p:sldId id="264" r:id="rId15"/>
   </p:sldIdLst>
   <p:sldSz cx="12191695" cy="6858000" type="screen4x3"/>
   <p:notesSz cx="6858000" cy="9144000"/>
@@ -3146,8 +3147,8 @@
         </p:nvSpPr>
         <p:spPr>
           <a:xfrm>
-            <a:off x="1097280" y="1463040"/>
-            <a:ext cx="10058400" cy="4114800"/>
+            <a:off x="1097280" y="1371600"/>
+            <a:ext cx="10058400" cy="4389120"/>
           </a:xfrm>
           <a:prstGeom prst="rect">
             <a:avLst/>
@@ -3162,7 +3163,7 @@
           <a:p>
             <a:pPr>
               <a:spcAft>
-                <a:spcPts val="1400"/>
+                <a:spcPts val="1200"/>
               </a:spcAft>
               <a:defRPr sz="1300" b="1">
                 <a:solidFill>
@@ -3171,12 +3172,12 @@
               </a:defRPr>
             </a:pPr>
             <a:r>
-              <a:t>DEVOPS CAPSTONE PROJECT — SESSION 21</a:t>
-            </a:r>
-          </a:p>
-          <a:p>
-            <a:pPr>
-              <a:defRPr sz="4000" b="1">
+              <a:t>DEVOPS CAPSTONE FINAL PRESENTATION — SESSION 21</a:t>
+            </a:r>
+          </a:p>
+          <a:p>
+            <a:pPr>
+              <a:defRPr sz="3800" b="1">
                 <a:solidFill>
                   <a:srgbClr val="F8FAFC"/>
                 </a:solidFill>
@@ -3189,7 +3190,7 @@
           <a:p>
             <a:pPr>
               <a:spcAft>
-                <a:spcPts val="2800"/>
+                <a:spcPts val="2400"/>
               </a:spcAft>
               <a:defRPr sz="1800">
                 <a:solidFill>
@@ -3198,11 +3199,14 @@
               </a:defRPr>
             </a:pPr>
             <a:r>
-              <a:t>Production-Grade GitOps, Microservices, EKS, Helm, Ingress &amp; Observability</a:t>
-            </a:r>
-          </a:p>
-          <a:p>
-            <a:pPr>
+              <a:t>Production GitOps Architecture: From Code to Monitored AWS EKS Cluster</a:t>
+            </a:r>
+          </a:p>
+          <a:p>
+            <a:pPr>
+              <a:spcAft>
+                <a:spcPts val="1200"/>
+              </a:spcAft>
               <a:defRPr sz="1300" b="1">
                 <a:solidFill>
                   <a:srgbClr val="34D399"/>
@@ -3222,7 +3226,11 @@
               </a:defRPr>
             </a:pPr>
             <a:r>
-              <a:t>Stack: React Vite • FastAPI • PostgreSQL • Docker • GHCR • Trivy • Terraform • AWS EKS • Helm • NGINX Ingress • HPA • Prometheus &amp; Grafana</a:t>
+              <a:t>Demonstrating the Complete 15-Stage DevOps Lifecycle:</a:t>
+            </a:r>
+            <a:br/>
+            <a:r>
+              <a:t>Application → Git → CI Pipeline → Docker → Trivy Scan → GHCR → Terraform → Kubernetes → Helm → Ingress → Autoscaling → Monitoring → Troubleshooting</a:t>
             </a:r>
           </a:p>
         </p:txBody>
@@ -3323,14 +3331,14 @@
           </a:p>
           <a:p>
             <a:pPr>
-              <a:defRPr sz="2400" b="1">
-                <a:solidFill>
-                  <a:srgbClr val="F8FAFC"/>
-                </a:solidFill>
-              </a:defRPr>
-            </a:pPr>
-            <a:r>
-              <a:t>End-to-End DevOps Architecture &amp; Demonstration Pipeline</a:t>
+              <a:defRPr sz="2200" b="1">
+                <a:solidFill>
+                  <a:srgbClr val="F8FAFC"/>
+                </a:solidFill>
+              </a:defRPr>
+            </a:pPr>
+            <a:r>
+              <a:t>End-to-End DevOps Architecture &amp; Toolchain</a:t>
             </a:r>
           </a:p>
         </p:txBody>
@@ -3403,14 +3411,14 @@
           <a:lstStyle/>
           <a:p>
             <a:pPr>
-              <a:defRPr sz="1500" b="1">
+              <a:defRPr sz="1400" b="1">
                 <a:solidFill>
                   <a:srgbClr val="38BDF8"/>
                 </a:solidFill>
               </a:defRPr>
             </a:pPr>
             <a:r>
-              <a:t>Phase 1: Build &amp; Verify</a:t>
+              <a:t>Phase 1: CI &amp; Code Security</a:t>
             </a:r>
           </a:p>
           <a:p>
@@ -3422,97 +3430,97 @@
               </a:defRPr>
             </a:pPr>
             <a:r>
-              <a:t>[ENGINEERING &amp; SECURITY]</a:t>
-            </a:r>
-          </a:p>
-          <a:p>
-            <a:pPr>
-              <a:spcAft>
-                <a:spcPts val="400"/>
-              </a:spcAft>
-              <a:defRPr sz="1100">
-                <a:solidFill>
-                  <a:srgbClr val="F8FAFC"/>
-                </a:solidFill>
-              </a:defRPr>
-            </a:pPr>
-            <a:r>
-              <a:t>•  Full-stack React (Vite) + FastAPI + PostgreSQL</a:t>
-            </a:r>
-          </a:p>
-          <a:p>
-            <a:pPr>
-              <a:spcAft>
-                <a:spcPts val="400"/>
-              </a:spcAft>
-              <a:defRPr sz="1100">
-                <a:solidFill>
-                  <a:srgbClr val="F8FAFC"/>
-                </a:solidFill>
-              </a:defRPr>
-            </a:pPr>
-            <a:r>
-              <a:t>•  Local development verified with automated tests</a:t>
-            </a:r>
-          </a:p>
-          <a:p>
-            <a:pPr>
-              <a:spcAft>
-                <a:spcPts val="400"/>
-              </a:spcAft>
-              <a:defRPr sz="1100">
-                <a:solidFill>
-                  <a:srgbClr val="F8FAFC"/>
-                </a:solidFill>
-              </a:defRPr>
-            </a:pPr>
-            <a:r>
-              <a:t>•  Git commit triggers GitHub Actions CI pipeline</a:t>
-            </a:r>
-          </a:p>
-          <a:p>
-            <a:pPr>
-              <a:spcAft>
-                <a:spcPts val="400"/>
-              </a:spcAft>
-              <a:defRPr sz="1100">
-                <a:solidFill>
-                  <a:srgbClr val="F8FAFC"/>
-                </a:solidFill>
-              </a:defRPr>
-            </a:pPr>
-            <a:r>
-              <a:t>•  Pytest test suite &amp; frontend production bundle check</a:t>
-            </a:r>
-          </a:p>
-          <a:p>
-            <a:pPr>
-              <a:spcAft>
-                <a:spcPts val="400"/>
-              </a:spcAft>
-              <a:defRPr sz="1100">
-                <a:solidFill>
-                  <a:srgbClr val="F8FAFC"/>
-                </a:solidFill>
-              </a:defRPr>
-            </a:pPr>
-            <a:r>
-              <a:t>•  Multi-stage Docker builds for minimal attack surface</a:t>
-            </a:r>
-          </a:p>
-          <a:p>
-            <a:pPr>
-              <a:spcAft>
-                <a:spcPts val="400"/>
-              </a:spcAft>
-              <a:defRPr sz="1100">
-                <a:solidFill>
-                  <a:srgbClr val="F8FAFC"/>
-                </a:solidFill>
-              </a:defRPr>
-            </a:pPr>
-            <a:r>
-              <a:t>•  Trivy static security vulnerability scanning (0 CVEs)</a:t>
+              <a:t>[AUTOMATED CI &amp; GITOPS]</a:t>
+            </a:r>
+          </a:p>
+          <a:p>
+            <a:pPr>
+              <a:spcAft>
+                <a:spcPts val="300"/>
+              </a:spcAft>
+              <a:defRPr sz="1050">
+                <a:solidFill>
+                  <a:srgbClr val="F8FAFC"/>
+                </a:solidFill>
+              </a:defRPr>
+            </a:pPr>
+            <a:r>
+              <a:t>• FastAPI + React (Vite) + PostgreSQL 16</a:t>
+            </a:r>
+          </a:p>
+          <a:p>
+            <a:pPr>
+              <a:spcAft>
+                <a:spcPts val="300"/>
+              </a:spcAft>
+              <a:defRPr sz="1050">
+                <a:solidFill>
+                  <a:srgbClr val="F8FAFC"/>
+                </a:solidFill>
+              </a:defRPr>
+            </a:pPr>
+            <a:r>
+              <a:t>• 12 Automated tests with pytest &amp; SQLite isolation</a:t>
+            </a:r>
+          </a:p>
+          <a:p>
+            <a:pPr>
+              <a:spcAft>
+                <a:spcPts val="300"/>
+              </a:spcAft>
+              <a:defRPr sz="1050">
+                <a:solidFill>
+                  <a:srgbClr val="F8FAFC"/>
+                </a:solidFill>
+              </a:defRPr>
+            </a:pPr>
+            <a:r>
+              <a:t>• Frontend production bundling with Vite &amp; Node 22</a:t>
+            </a:r>
+          </a:p>
+          <a:p>
+            <a:pPr>
+              <a:spcAft>
+                <a:spcPts val="300"/>
+              </a:spcAft>
+              <a:defRPr sz="1050">
+                <a:solidFill>
+                  <a:srgbClr val="F8FAFC"/>
+                </a:solidFill>
+              </a:defRPr>
+            </a:pPr>
+            <a:r>
+              <a:t>• Multi-stage Docker builds (slim / alpine)</a:t>
+            </a:r>
+          </a:p>
+          <a:p>
+            <a:pPr>
+              <a:spcAft>
+                <a:spcPts val="300"/>
+              </a:spcAft>
+              <a:defRPr sz="1050">
+                <a:solidFill>
+                  <a:srgbClr val="F8FAFC"/>
+                </a:solidFill>
+              </a:defRPr>
+            </a:pPr>
+            <a:r>
+              <a:t>• Trivy vulnerability scanner: 0 HIGH / CRITICAL CVEs</a:t>
+            </a:r>
+          </a:p>
+          <a:p>
+            <a:pPr>
+              <a:spcAft>
+                <a:spcPts val="300"/>
+              </a:spcAft>
+              <a:defRPr sz="1050">
+                <a:solidFill>
+                  <a:srgbClr val="F8FAFC"/>
+                </a:solidFill>
+              </a:defRPr>
+            </a:pPr>
+            <a:r>
+              <a:t>• Automated container publish to GHCR with commit SHA</a:t>
             </a:r>
           </a:p>
         </p:txBody>
@@ -3585,14 +3593,14 @@
           <a:lstStyle/>
           <a:p>
             <a:pPr>
-              <a:defRPr sz="1500" b="1">
+              <a:defRPr sz="1400" b="1">
                 <a:solidFill>
                   <a:srgbClr val="38BDF8"/>
                 </a:solidFill>
               </a:defRPr>
             </a:pPr>
             <a:r>
-              <a:t>Phase 2: Deploy &amp; Orchestrate</a:t>
+              <a:t>Phase 2: Cloud Infrastructure</a:t>
             </a:r>
           </a:p>
           <a:p>
@@ -3604,97 +3612,97 @@
               </a:defRPr>
             </a:pPr>
             <a:r>
-              <a:t>[INFRASTRUCTURE &amp; K8S]</a:t>
-            </a:r>
-          </a:p>
-          <a:p>
-            <a:pPr>
-              <a:spcAft>
-                <a:spcPts val="400"/>
-              </a:spcAft>
-              <a:defRPr sz="1100">
-                <a:solidFill>
-                  <a:srgbClr val="F8FAFC"/>
-                </a:solidFill>
-              </a:defRPr>
-            </a:pPr>
-            <a:r>
-              <a:t>•  GitHub Container Registry (GHCR) image packaging</a:t>
-            </a:r>
-          </a:p>
-          <a:p>
-            <a:pPr>
-              <a:spcAft>
-                <a:spcPts val="400"/>
-              </a:spcAft>
-              <a:defRPr sz="1100">
-                <a:solidFill>
-                  <a:srgbClr val="F8FAFC"/>
-                </a:solidFill>
-              </a:defRPr>
-            </a:pPr>
-            <a:r>
-              <a:t>•  Terraform automated AWS infrastructure provisioning</a:t>
-            </a:r>
-          </a:p>
-          <a:p>
-            <a:pPr>
-              <a:spcAft>
-                <a:spcPts val="400"/>
-              </a:spcAft>
-              <a:defRPr sz="1100">
-                <a:solidFill>
-                  <a:srgbClr val="F8FAFC"/>
-                </a:solidFill>
-              </a:defRPr>
-            </a:pPr>
-            <a:r>
-              <a:t>•  AWS VPC (public &amp; private subnets, NAT Gateway)</a:t>
-            </a:r>
-          </a:p>
-          <a:p>
-            <a:pPr>
-              <a:spcAft>
-                <a:spcPts val="400"/>
-              </a:spcAft>
-              <a:defRPr sz="1100">
-                <a:solidFill>
-                  <a:srgbClr val="F8FAFC"/>
-                </a:solidFill>
-              </a:defRPr>
-            </a:pPr>
-            <a:r>
-              <a:t>•  Amazon EKS Managed Kubernetes Cluster v1.31</a:t>
-            </a:r>
-          </a:p>
-          <a:p>
-            <a:pPr>
-              <a:spcAft>
-                <a:spcPts val="400"/>
-              </a:spcAft>
-              <a:defRPr sz="1100">
-                <a:solidFill>
-                  <a:srgbClr val="F8FAFC"/>
-                </a:solidFill>
-              </a:defRPr>
-            </a:pPr>
-            <a:r>
-              <a:t>•  Helm package management with custom values</a:t>
-            </a:r>
-          </a:p>
-          <a:p>
-            <a:pPr>
-              <a:spcAft>
-                <a:spcPts val="400"/>
-              </a:spcAft>
-              <a:defRPr sz="1100">
-                <a:solidFill>
-                  <a:srgbClr val="F8FAFC"/>
-                </a:solidFill>
-              </a:defRPr>
-            </a:pPr>
-            <a:r>
-              <a:t>•  Declarative deployments to studytrack &amp; taskboard</a:t>
+              <a:t>[TERRAFORM &amp; AWS EKS]</a:t>
+            </a:r>
+          </a:p>
+          <a:p>
+            <a:pPr>
+              <a:spcAft>
+                <a:spcPts val="300"/>
+              </a:spcAft>
+              <a:defRPr sz="1050">
+                <a:solidFill>
+                  <a:srgbClr val="F8FAFC"/>
+                </a:solidFill>
+              </a:defRPr>
+            </a:pPr>
+            <a:r>
+              <a:t>• Terraform IaC provisioning in AWS ap-south-1</a:t>
+            </a:r>
+          </a:p>
+          <a:p>
+            <a:pPr>
+              <a:spcAft>
+                <a:spcPts val="300"/>
+              </a:spcAft>
+              <a:defRPr sz="1050">
+                <a:solidFill>
+                  <a:srgbClr val="F8FAFC"/>
+                </a:solidFill>
+              </a:defRPr>
+            </a:pPr>
+            <a:r>
+              <a:t>• AWS VPC: 2 Public + 2 Private subnets + NAT Gateway</a:t>
+            </a:r>
+          </a:p>
+          <a:p>
+            <a:pPr>
+              <a:spcAft>
+                <a:spcPts val="300"/>
+              </a:spcAft>
+              <a:defRPr sz="1050">
+                <a:solidFill>
+                  <a:srgbClr val="F8FAFC"/>
+                </a:solidFill>
+              </a:defRPr>
+            </a:pPr>
+            <a:r>
+              <a:t>• Amazon EKS 1.31 Managed Kubernetes Cluster</a:t>
+            </a:r>
+          </a:p>
+          <a:p>
+            <a:pPr>
+              <a:spcAft>
+                <a:spcPts val="300"/>
+              </a:spcAft>
+              <a:defRPr sz="1050">
+                <a:solidFill>
+                  <a:srgbClr val="F8FAFC"/>
+                </a:solidFill>
+              </a:defRPr>
+            </a:pPr>
+            <a:r>
+              <a:t>• EKS Managed Node Group with Free Tier t3.small instances</a:t>
+            </a:r>
+          </a:p>
+          <a:p>
+            <a:pPr>
+              <a:spcAft>
+                <a:spcPts val="300"/>
+              </a:spcAft>
+              <a:defRPr sz="1050">
+                <a:solidFill>
+                  <a:srgbClr val="F8FAFC"/>
+                </a:solidFill>
+              </a:defRPr>
+            </a:pPr>
+            <a:r>
+              <a:t>• OIDC Provider &amp; IAM Least-Privilege Policies</a:t>
+            </a:r>
+          </a:p>
+          <a:p>
+            <a:pPr>
+              <a:spcAft>
+                <a:spcPts val="300"/>
+              </a:spcAft>
+              <a:defRPr sz="1050">
+                <a:solidFill>
+                  <a:srgbClr val="F8FAFC"/>
+                </a:solidFill>
+              </a:defRPr>
+            </a:pPr>
+            <a:r>
+              <a:t>• KMS Envelope Encryption for Kubernetes Secrets</a:t>
             </a:r>
           </a:p>
         </p:txBody>
@@ -3767,14 +3775,14 @@
           <a:lstStyle/>
           <a:p>
             <a:pPr>
-              <a:defRPr sz="1500" b="1">
+              <a:defRPr sz="1400" b="1">
                 <a:solidFill>
                   <a:srgbClr val="38BDF8"/>
                 </a:solidFill>
               </a:defRPr>
             </a:pPr>
             <a:r>
-              <a:t>Phase 3: Route &amp; Observe</a:t>
+              <a:t>Phase 3: Delivery &amp; SRE</a:t>
             </a:r>
           </a:p>
           <a:p>
@@ -3786,97 +3794,97 @@
               </a:defRPr>
             </a:pPr>
             <a:r>
-              <a:t>[OPERATIONS &amp; SRE]</a:t>
-            </a:r>
-          </a:p>
-          <a:p>
-            <a:pPr>
-              <a:spcAft>
-                <a:spcPts val="400"/>
-              </a:spcAft>
-              <a:defRPr sz="1100">
-                <a:solidFill>
-                  <a:srgbClr val="F8FAFC"/>
-                </a:solidFill>
-              </a:defRPr>
-            </a:pPr>
-            <a:r>
-              <a:t>•  NGINX Ingress Controller for single-entry routing</a:t>
-            </a:r>
-          </a:p>
-          <a:p>
-            <a:pPr>
-              <a:spcAft>
-                <a:spcPts val="400"/>
-              </a:spcAft>
-              <a:defRPr sz="1100">
-                <a:solidFill>
-                  <a:srgbClr val="F8FAFC"/>
-                </a:solidFill>
-              </a:defRPr>
-            </a:pPr>
-            <a:r>
-              <a:t>•  Horizontal Pod Autoscaler (HPA) CPU thresholding</a:t>
-            </a:r>
-          </a:p>
-          <a:p>
-            <a:pPr>
-              <a:spcAft>
-                <a:spcPts val="400"/>
-              </a:spcAft>
-              <a:defRPr sz="1100">
-                <a:solidFill>
-                  <a:srgbClr val="F8FAFC"/>
-                </a:solidFill>
-              </a:defRPr>
-            </a:pPr>
-            <a:r>
-              <a:t>•  Prometheus metrics scraping (/metrics endpoint)</a:t>
-            </a:r>
-          </a:p>
-          <a:p>
-            <a:pPr>
-              <a:spcAft>
-                <a:spcPts val="400"/>
-              </a:spcAft>
-              <a:defRPr sz="1100">
-                <a:solidFill>
-                  <a:srgbClr val="F8FAFC"/>
-                </a:solidFill>
-              </a:defRPr>
-            </a:pPr>
-            <a:r>
-              <a:t>•  Grafana real-time telemetry dashboards</a:t>
-            </a:r>
-          </a:p>
-          <a:p>
-            <a:pPr>
-              <a:spcAft>
-                <a:spcPts val="400"/>
-              </a:spcAft>
-              <a:defRPr sz="1100">
-                <a:solidFill>
-                  <a:srgbClr val="F8FAFC"/>
-                </a:solidFill>
-              </a:defRPr>
-            </a:pPr>
-            <a:r>
-              <a:t>•  Chaos engineering &amp; failure simulation runbook</a:t>
-            </a:r>
-          </a:p>
-          <a:p>
-            <a:pPr>
-              <a:spcAft>
-                <a:spcPts val="400"/>
-              </a:spcAft>
-              <a:defRPr sz="1100">
-                <a:solidFill>
-                  <a:srgbClr val="F8FAFC"/>
-                </a:solidFill>
-              </a:defRPr>
-            </a:pPr>
-            <a:r>
-              <a:t>•  Live remediation of Pod and Service errors</a:t>
+              <a:t>[HELM, INGRESS &amp; OBSERVABILITY]</a:t>
+            </a:r>
+          </a:p>
+          <a:p>
+            <a:pPr>
+              <a:spcAft>
+                <a:spcPts val="300"/>
+              </a:spcAft>
+              <a:defRPr sz="1050">
+                <a:solidFill>
+                  <a:srgbClr val="F8FAFC"/>
+                </a:solidFill>
+              </a:defRPr>
+            </a:pPr>
+            <a:r>
+              <a:t>• Helm packaging with values for taskboard namespace</a:t>
+            </a:r>
+          </a:p>
+          <a:p>
+            <a:pPr>
+              <a:spcAft>
+                <a:spcPts val="300"/>
+              </a:spcAft>
+              <a:defRPr sz="1050">
+                <a:solidFill>
+                  <a:srgbClr val="F8FAFC"/>
+                </a:solidFill>
+              </a:defRPr>
+            </a:pPr>
+            <a:r>
+              <a:t>• NGINX Ingress Controller with AWS ELB integration</a:t>
+            </a:r>
+          </a:p>
+          <a:p>
+            <a:pPr>
+              <a:spcAft>
+                <a:spcPts val="300"/>
+              </a:spcAft>
+              <a:defRPr sz="1050">
+                <a:solidFill>
+                  <a:srgbClr val="F8FAFC"/>
+                </a:solidFill>
+              </a:defRPr>
+            </a:pPr>
+            <a:r>
+              <a:t>• Horizontal Pod Autoscaler (HPA) targeting 60% CPU</a:t>
+            </a:r>
+          </a:p>
+          <a:p>
+            <a:pPr>
+              <a:spcAft>
+                <a:spcPts val="300"/>
+              </a:spcAft>
+              <a:defRPr sz="1050">
+                <a:solidFill>
+                  <a:srgbClr val="F8FAFC"/>
+                </a:solidFill>
+              </a:defRPr>
+            </a:pPr>
+            <a:r>
+              <a:t>• Prometheus metrics scraping (/metrics endpoint)</a:t>
+            </a:r>
+          </a:p>
+          <a:p>
+            <a:pPr>
+              <a:spcAft>
+                <a:spcPts val="300"/>
+              </a:spcAft>
+              <a:defRPr sz="1050">
+                <a:solidFill>
+                  <a:srgbClr val="F8FAFC"/>
+                </a:solidFill>
+              </a:defRPr>
+            </a:pPr>
+            <a:r>
+              <a:t>• Grafana real-time telemetry dashboards</a:t>
+            </a:r>
+          </a:p>
+          <a:p>
+            <a:pPr>
+              <a:spcAft>
+                <a:spcPts val="300"/>
+              </a:spcAft>
+              <a:defRPr sz="1050">
+                <a:solidFill>
+                  <a:srgbClr val="F8FAFC"/>
+                </a:solidFill>
+              </a:defRPr>
+            </a:pPr>
+            <a:r>
+              <a:t>• Chaos engineering &amp; Live service troubleshooting runbook</a:t>
             </a:r>
           </a:p>
         </p:txBody>
@@ -3977,14 +3985,14 @@
           </a:p>
           <a:p>
             <a:pPr>
-              <a:defRPr sz="2400" b="1">
-                <a:solidFill>
-                  <a:srgbClr val="F8FAFC"/>
-                </a:solidFill>
-              </a:defRPr>
-            </a:pPr>
-            <a:r>
-              <a:t>Part 1, 2, 3 — Application, REST API Suite &amp; PostgreSQL Database</a:t>
+              <a:defRPr sz="2200" b="1">
+                <a:solidFill>
+                  <a:srgbClr val="F8FAFC"/>
+                </a:solidFill>
+              </a:defRPr>
+            </a:pPr>
+            <a:r>
+              <a:t>Part 1 &amp; 2 — Application UI &amp; FastAPI Swagger REST API Suite</a:t>
             </a:r>
           </a:p>
         </p:txBody>
@@ -3998,7 +4006,7 @@
         <p:spPr>
           <a:xfrm>
             <a:off x="731520" y="1645920"/>
-            <a:ext cx="3291840" cy="4663440"/>
+            <a:ext cx="5120640" cy="2286000"/>
           </a:xfrm>
           <a:prstGeom prst="roundRect">
             <a:avLst/>
@@ -4043,7 +4051,7 @@
         <p:spPr>
           <a:xfrm>
             <a:off x="960120" y="1828800"/>
-            <a:ext cx="2834640" cy="4297680"/>
+            <a:ext cx="4663440" cy="1920240"/>
           </a:xfrm>
           <a:prstGeom prst="rect">
             <a:avLst/>
@@ -4057,14 +4065,14 @@
           <a:lstStyle/>
           <a:p>
             <a:pPr>
-              <a:defRPr sz="1500" b="1">
+              <a:defRPr sz="1400" b="1">
                 <a:solidFill>
                   <a:srgbClr val="38BDF8"/>
                 </a:solidFill>
               </a:defRPr>
             </a:pPr>
             <a:r>
-              <a:t>1. StudyTrack &amp; TaskBoard UI</a:t>
+              <a:t>1. StudyTrack TaskBoard UI</a:t>
             </a:r>
           </a:p>
           <a:p>
@@ -4082,91 +4090,61 @@
           <a:p>
             <a:pPr>
               <a:spcAft>
-                <a:spcPts val="400"/>
-              </a:spcAft>
-              <a:defRPr sz="1100">
-                <a:solidFill>
-                  <a:srgbClr val="F8FAFC"/>
-                </a:solidFill>
-              </a:defRPr>
-            </a:pPr>
-            <a:r>
-              <a:t>•  Responsive modern interface with Glassmorphism UI</a:t>
-            </a:r>
-          </a:p>
-          <a:p>
-            <a:pPr>
-              <a:spcAft>
-                <a:spcPts val="400"/>
-              </a:spcAft>
-              <a:defRPr sz="1100">
-                <a:solidFill>
-                  <a:srgbClr val="F8FAFC"/>
-                </a:solidFill>
-              </a:defRPr>
-            </a:pPr>
-            <a:r>
-              <a:t>•  Live assignment and task tracking dashboard</a:t>
-            </a:r>
-          </a:p>
-          <a:p>
-            <a:pPr>
-              <a:spcAft>
-                <a:spcPts val="400"/>
-              </a:spcAft>
-              <a:defRPr sz="1100">
-                <a:solidFill>
-                  <a:srgbClr val="F8FAFC"/>
-                </a:solidFill>
-              </a:defRPr>
-            </a:pPr>
-            <a:r>
-              <a:t>•  Filters by status: Pending, In Progress, Submitted</a:t>
-            </a:r>
-          </a:p>
-          <a:p>
-            <a:pPr>
-              <a:spcAft>
-                <a:spcPts val="400"/>
-              </a:spcAft>
-              <a:defRPr sz="1100">
-                <a:solidFill>
-                  <a:srgbClr val="F8FAFC"/>
-                </a:solidFill>
-              </a:defRPr>
-            </a:pPr>
-            <a:r>
-              <a:t>•  Real-time completion percentage metrics and progress bars</a:t>
-            </a:r>
-          </a:p>
-          <a:p>
-            <a:pPr>
-              <a:spcAft>
-                <a:spcPts val="400"/>
-              </a:spcAft>
-              <a:defRPr sz="1100">
-                <a:solidFill>
-                  <a:srgbClr val="F8FAFC"/>
-                </a:solidFill>
-              </a:defRPr>
-            </a:pPr>
-            <a:r>
-              <a:t>•  Quick-create modal for assignments and tasks</a:t>
-            </a:r>
-          </a:p>
-          <a:p>
-            <a:pPr>
-              <a:spcAft>
-                <a:spcPts val="400"/>
-              </a:spcAft>
-              <a:defRPr sz="1100">
-                <a:solidFill>
-                  <a:srgbClr val="F8FAFC"/>
-                </a:solidFill>
-              </a:defRPr>
-            </a:pPr>
-            <a:r>
-              <a:t>•  Instant optimistic UI updates with error boundaries</a:t>
+                <a:spcPts val="300"/>
+              </a:spcAft>
+              <a:defRPr sz="1050">
+                <a:solidFill>
+                  <a:srgbClr val="F8FAFC"/>
+                </a:solidFill>
+              </a:defRPr>
+            </a:pPr>
+            <a:r>
+              <a:t>• Modern glassmorphism UI with live task/assignment tracking</a:t>
+            </a:r>
+          </a:p>
+          <a:p>
+            <a:pPr>
+              <a:spcAft>
+                <a:spcPts val="300"/>
+              </a:spcAft>
+              <a:defRPr sz="1050">
+                <a:solidFill>
+                  <a:srgbClr val="F8FAFC"/>
+                </a:solidFill>
+              </a:defRPr>
+            </a:pPr>
+            <a:r>
+              <a:t>• Status columns: PENDING, IN_PROGRESS, SUBMITTED</a:t>
+            </a:r>
+          </a:p>
+          <a:p>
+            <a:pPr>
+              <a:spcAft>
+                <a:spcPts val="300"/>
+              </a:spcAft>
+              <a:defRPr sz="1050">
+                <a:solidFill>
+                  <a:srgbClr val="F8FAFC"/>
+                </a:solidFill>
+              </a:defRPr>
+            </a:pPr>
+            <a:r>
+              <a:t>• Real-time completion percentage calculations and progress bars</a:t>
+            </a:r>
+          </a:p>
+          <a:p>
+            <a:pPr>
+              <a:spcAft>
+                <a:spcPts val="300"/>
+              </a:spcAft>
+              <a:defRPr sz="1050">
+                <a:solidFill>
+                  <a:srgbClr val="F8FAFC"/>
+                </a:solidFill>
+              </a:defRPr>
+            </a:pPr>
+            <a:r>
+              <a:t>• Interactive modal for task creation with validation</a:t>
             </a:r>
           </a:p>
         </p:txBody>
@@ -4179,8 +4157,8 @@
         </p:nvSpPr>
         <p:spPr>
           <a:xfrm>
-            <a:off x="4389120" y="1645920"/>
-            <a:ext cx="3291840" cy="4663440"/>
+            <a:off x="731520" y="4114800"/>
+            <a:ext cx="5120640" cy="2194560"/>
           </a:xfrm>
           <a:prstGeom prst="roundRect">
             <a:avLst/>
@@ -4224,8 +4202,8 @@
         </p:nvSpPr>
         <p:spPr>
           <a:xfrm>
-            <a:off x="4617720" y="1828800"/>
-            <a:ext cx="2834640" cy="4297680"/>
+            <a:off x="960120" y="4297680"/>
+            <a:ext cx="4663440" cy="1828800"/>
           </a:xfrm>
           <a:prstGeom prst="rect">
             <a:avLst/>
@@ -4239,14 +4217,14 @@
           <a:lstStyle/>
           <a:p>
             <a:pPr>
-              <a:defRPr sz="1500" b="1">
+              <a:defRPr sz="1400" b="1">
                 <a:solidFill>
                   <a:srgbClr val="38BDF8"/>
                 </a:solidFill>
               </a:defRPr>
             </a:pPr>
             <a:r>
-              <a:t>2. FastAPI OpenAPI / Swagger</a:t>
+              <a:t>2. FastAPI Swagger OpenAPI Suite (/docs)</a:t>
             </a:r>
           </a:p>
           <a:p>
@@ -4264,307 +4242,113 @@
           <a:p>
             <a:pPr>
               <a:spcAft>
-                <a:spcPts val="400"/>
-              </a:spcAft>
-              <a:defRPr sz="1100">
-                <a:solidFill>
-                  <a:srgbClr val="F8FAFC"/>
-                </a:solidFill>
-              </a:defRPr>
-            </a:pPr>
-            <a:r>
-              <a:t>•  Interactive documentation live at /docs</a:t>
-            </a:r>
-          </a:p>
-          <a:p>
-            <a:pPr>
-              <a:spcAft>
-                <a:spcPts val="400"/>
-              </a:spcAft>
-              <a:defRPr sz="1100">
-                <a:solidFill>
-                  <a:srgbClr val="F8FAFC"/>
-                </a:solidFill>
-              </a:defRPr>
-            </a:pPr>
-            <a:r>
-              <a:t>•  GET /api/assignments — List &amp; filter tasks</a:t>
-            </a:r>
-          </a:p>
-          <a:p>
-            <a:pPr>
-              <a:spcAft>
-                <a:spcPts val="400"/>
-              </a:spcAft>
-              <a:defRPr sz="1100">
-                <a:solidFill>
-                  <a:srgbClr val="F8FAFC"/>
-                </a:solidFill>
-              </a:defRPr>
-            </a:pPr>
-            <a:r>
-              <a:t>•  POST /api/assignments — Create task (201 Created)</a:t>
-            </a:r>
-          </a:p>
-          <a:p>
-            <a:pPr>
-              <a:spcAft>
-                <a:spcPts val="400"/>
-              </a:spcAft>
-              <a:defRPr sz="1100">
-                <a:solidFill>
-                  <a:srgbClr val="F8FAFC"/>
-                </a:solidFill>
-              </a:defRPr>
-            </a:pPr>
-            <a:r>
-              <a:t>•  GET /api/assignments/{id} — Retrieve task detail</a:t>
-            </a:r>
-          </a:p>
-          <a:p>
-            <a:pPr>
-              <a:spcAft>
-                <a:spcPts val="400"/>
-              </a:spcAft>
-              <a:defRPr sz="1100">
-                <a:solidFill>
-                  <a:srgbClr val="F8FAFC"/>
-                </a:solidFill>
-              </a:defRPr>
-            </a:pPr>
-            <a:r>
-              <a:t>•  PUT /api/assignments/{id} — Full/partial update</a:t>
-            </a:r>
-          </a:p>
-          <a:p>
-            <a:pPr>
-              <a:spcAft>
-                <a:spcPts val="400"/>
-              </a:spcAft>
-              <a:defRPr sz="1100">
-                <a:solidFill>
-                  <a:srgbClr val="F8FAFC"/>
-                </a:solidFill>
-              </a:defRPr>
-            </a:pPr>
-            <a:r>
-              <a:t>•  DELETE /api/assignments/{id} — Delete task</a:t>
-            </a:r>
-          </a:p>
-          <a:p>
-            <a:pPr>
-              <a:spcAft>
-                <a:spcPts val="400"/>
-              </a:spcAft>
-              <a:defRPr sz="1100">
-                <a:solidFill>
-                  <a:srgbClr val="F8FAFC"/>
-                </a:solidFill>
-              </a:defRPr>
-            </a:pPr>
-            <a:r>
-              <a:t>•  GET /api/assignments/stats — Aggregated metrics</a:t>
-            </a:r>
-          </a:p>
-          <a:p>
-            <a:pPr>
-              <a:spcAft>
-                <a:spcPts val="400"/>
-              </a:spcAft>
-              <a:defRPr sz="1100">
-                <a:solidFill>
-                  <a:srgbClr val="F8FAFC"/>
-                </a:solidFill>
-              </a:defRPr>
-            </a:pPr>
-            <a:r>
-              <a:t>•  GET /health &amp; /ready — Liveness &amp; readiness probes</a:t>
-            </a:r>
-          </a:p>
-        </p:txBody>
-      </p:sp>
-      <p:sp>
-        <p:nvSpPr>
-          <p:cNvPr id="8" name="Rounded Rectangle 7"/>
-          <p:cNvSpPr/>
+                <a:spcPts val="300"/>
+              </a:spcAft>
+              <a:defRPr sz="1050">
+                <a:solidFill>
+                  <a:srgbClr val="F8FAFC"/>
+                </a:solidFill>
+              </a:defRPr>
+            </a:pPr>
+            <a:r>
+              <a:t>• GET /api/assignments — List &amp; filter by subject</a:t>
+            </a:r>
+          </a:p>
+          <a:p>
+            <a:pPr>
+              <a:spcAft>
+                <a:spcPts val="300"/>
+              </a:spcAft>
+              <a:defRPr sz="1050">
+                <a:solidFill>
+                  <a:srgbClr val="F8FAFC"/>
+                </a:solidFill>
+              </a:defRPr>
+            </a:pPr>
+            <a:r>
+              <a:t>• POST /api/assignments — Create task (201 Created)</a:t>
+            </a:r>
+          </a:p>
+          <a:p>
+            <a:pPr>
+              <a:spcAft>
+                <a:spcPts val="300"/>
+              </a:spcAft>
+              <a:defRPr sz="1050">
+                <a:solidFill>
+                  <a:srgbClr val="F8FAFC"/>
+                </a:solidFill>
+              </a:defRPr>
+            </a:pPr>
+            <a:r>
+              <a:t>• GET/PUT/DELETE /api/assignments/{id} — Full CRUD operations</a:t>
+            </a:r>
+          </a:p>
+          <a:p>
+            <a:pPr>
+              <a:spcAft>
+                <a:spcPts val="300"/>
+              </a:spcAft>
+              <a:defRPr sz="1050">
+                <a:solidFill>
+                  <a:srgbClr val="F8FAFC"/>
+                </a:solidFill>
+              </a:defRPr>
+            </a:pPr>
+            <a:r>
+              <a:t>• GET /health, /ready, /metrics — Probes &amp; telemetry</a:t>
+            </a:r>
+          </a:p>
+        </p:txBody>
+      </p:sp>
+      <p:pic>
+        <p:nvPicPr>
+          <p:cNvPr id="8" name="Picture 7" descr="01-application-taskboard.png"/>
+          <p:cNvPicPr>
+            <a:picLocks noChangeAspect="1"/>
+          </p:cNvPicPr>
           <p:nvPr/>
-        </p:nvSpPr>
-        <p:spPr>
-          <a:xfrm>
-            <a:off x="8046720" y="1645920"/>
-            <a:ext cx="3291840" cy="4663440"/>
-          </a:xfrm>
-          <a:prstGeom prst="roundRect">
-            <a:avLst/>
-          </a:prstGeom>
-          <a:solidFill>
-            <a:srgbClr val="1E293B"/>
-          </a:solidFill>
-          <a:ln w="12700">
-            <a:solidFill>
-              <a:srgbClr val="334155"/>
-            </a:solidFill>
-          </a:ln>
-        </p:spPr>
-        <p:style>
-          <a:lnRef idx="1">
-            <a:schemeClr val="accent1"/>
-          </a:lnRef>
-          <a:fillRef idx="3">
-            <a:schemeClr val="accent1"/>
-          </a:fillRef>
-          <a:effectRef idx="2">
-            <a:schemeClr val="accent1"/>
-          </a:effectRef>
-          <a:fontRef idx="minor">
-            <a:schemeClr val="lt1"/>
-          </a:fontRef>
-        </p:style>
-        <p:txBody>
-          <a:bodyPr rtlCol="0" anchor="ctr"/>
-          <a:lstStyle/>
-          <a:p>
-            <a:pPr algn="ctr"/>
-          </a:p>
-        </p:txBody>
-      </p:sp>
-      <p:sp>
-        <p:nvSpPr>
-          <p:cNvPr id="9" name="TextBox 8"/>
-          <p:cNvSpPr txBox="1"/>
-          <p:nvPr/>
-        </p:nvSpPr>
-        <p:spPr>
-          <a:xfrm>
-            <a:off x="8275320" y="1828800"/>
-            <a:ext cx="2834640" cy="4297680"/>
+        </p:nvPicPr>
+        <p:blipFill>
+          <a:blip r:embed="rId2"/>
+          <a:stretch>
+            <a:fillRect/>
+          </a:stretch>
+        </p:blipFill>
+        <p:spPr>
+          <a:xfrm>
+            <a:off x="6217920" y="1645920"/>
+            <a:ext cx="5303520" cy="2286000"/>
           </a:xfrm>
           <a:prstGeom prst="rect">
             <a:avLst/>
           </a:prstGeom>
-          <a:noFill/>
-        </p:spPr>
-        <p:txBody>
-          <a:bodyPr wrap="square" lIns="0" tIns="0" rIns="0" bIns="0">
-            <a:spAutoFit/>
-          </a:bodyPr>
-          <a:lstStyle/>
-          <a:p>
-            <a:pPr>
-              <a:defRPr sz="1500" b="1">
-                <a:solidFill>
-                  <a:srgbClr val="38BDF8"/>
-                </a:solidFill>
-              </a:defRPr>
-            </a:pPr>
-            <a:r>
-              <a:t>3. PostgreSQL Persistence</a:t>
-            </a:r>
-          </a:p>
-          <a:p>
-            <a:pPr>
-              <a:defRPr sz="1000" b="1">
-                <a:solidFill>
-                  <a:srgbClr val="34D399"/>
-                </a:solidFill>
-              </a:defRPr>
-            </a:pPr>
-            <a:r>
-              <a:t>[PART 3: DATABASE]</a:t>
-            </a:r>
-          </a:p>
-          <a:p>
-            <a:pPr>
-              <a:spcAft>
-                <a:spcPts val="400"/>
-              </a:spcAft>
-              <a:defRPr sz="1100">
-                <a:solidFill>
-                  <a:srgbClr val="F8FAFC"/>
-                </a:solidFill>
-              </a:defRPr>
-            </a:pPr>
-            <a:r>
-              <a:t>•  Stateful container with persistent volume storage</a:t>
-            </a:r>
-          </a:p>
-          <a:p>
-            <a:pPr>
-              <a:spcAft>
-                <a:spcPts val="400"/>
-              </a:spcAft>
-              <a:defRPr sz="1100">
-                <a:solidFill>
-                  <a:srgbClr val="F8FAFC"/>
-                </a:solidFill>
-              </a:defRPr>
-            </a:pPr>
-            <a:r>
-              <a:t>•  Relational schema mapping tasks and assignments</a:t>
-            </a:r>
-          </a:p>
-          <a:p>
-            <a:pPr>
-              <a:spcAft>
-                <a:spcPts val="400"/>
-              </a:spcAft>
-              <a:defRPr sz="1100">
-                <a:solidFill>
-                  <a:srgbClr val="F8FAFC"/>
-                </a:solidFill>
-              </a:defRPr>
-            </a:pPr>
-            <a:r>
-              <a:t>•  Columns: id, title, subject, due_date, progress, status</a:t>
-            </a:r>
-          </a:p>
-          <a:p>
-            <a:pPr>
-              <a:spcAft>
-                <a:spcPts val="400"/>
-              </a:spcAft>
-              <a:defRPr sz="1100">
-                <a:solidFill>
-                  <a:srgbClr val="F8FAFC"/>
-                </a:solidFill>
-              </a:defRPr>
-            </a:pPr>
-            <a:r>
-              <a:t>•  SQLAlchemy ORM with strict Pydantic schemas</a:t>
-            </a:r>
-          </a:p>
-          <a:p>
-            <a:pPr>
-              <a:spcAft>
-                <a:spcPts val="400"/>
-              </a:spcAft>
-              <a:defRPr sz="1100">
-                <a:solidFill>
-                  <a:srgbClr val="F8FAFC"/>
-                </a:solidFill>
-              </a:defRPr>
-            </a:pPr>
-            <a:r>
-              <a:t>•  Connection pooling and automated schema initialization</a:t>
-            </a:r>
-          </a:p>
-          <a:p>
-            <a:pPr>
-              <a:spcAft>
-                <a:spcPts val="400"/>
-              </a:spcAft>
-              <a:defRPr sz="1100">
-                <a:solidFill>
-                  <a:srgbClr val="F8FAFC"/>
-                </a:solidFill>
-              </a:defRPr>
-            </a:pPr>
-            <a:r>
-              <a:t>•  Verified persistence across pod restarts</a:t>
-            </a:r>
-          </a:p>
-        </p:txBody>
-      </p:sp>
+        </p:spPr>
+      </p:pic>
+      <p:pic>
+        <p:nvPicPr>
+          <p:cNvPr id="9" name="Picture 8" descr="02-fastapi-swagger-docs.png"/>
+          <p:cNvPicPr>
+            <a:picLocks noChangeAspect="1"/>
+          </p:cNvPicPr>
+          <p:nvPr/>
+        </p:nvPicPr>
+        <p:blipFill>
+          <a:blip r:embed="rId3"/>
+          <a:stretch>
+            <a:fillRect/>
+          </a:stretch>
+        </p:blipFill>
+        <p:spPr>
+          <a:xfrm>
+            <a:off x="6217920" y="4114800"/>
+            <a:ext cx="5303520" cy="2194560"/>
+          </a:xfrm>
+          <a:prstGeom prst="rect">
+            <a:avLst/>
+          </a:prstGeom>
+        </p:spPr>
+      </p:pic>
     </p:spTree>
   </p:cSld>
   <p:clrMapOvr>
@@ -4661,14 +4445,14 @@
           </a:p>
           <a:p>
             <a:pPr>
-              <a:defRPr sz="2400" b="1">
-                <a:solidFill>
-                  <a:srgbClr val="F8FAFC"/>
-                </a:solidFill>
-              </a:defRPr>
-            </a:pPr>
-            <a:r>
-              <a:t>Part 4, 5, 6, 8 — GitOps, CI/CD Pipeline &amp; GHCR Container Registry</a:t>
+              <a:defRPr sz="2200" b="1">
+                <a:solidFill>
+                  <a:srgbClr val="F8FAFC"/>
+                </a:solidFill>
+              </a:defRPr>
+            </a:pPr>
+            <a:r>
+              <a:t>Part 3, 4, 5 — PostgreSQL Database, GitOps &amp; CI Pipeline</a:t>
             </a:r>
           </a:p>
         </p:txBody>
@@ -4682,7 +4466,7 @@
         <p:spPr>
           <a:xfrm>
             <a:off x="731520" y="1645920"/>
-            <a:ext cx="3291840" cy="4663440"/>
+            <a:ext cx="5120640" cy="2286000"/>
           </a:xfrm>
           <a:prstGeom prst="roundRect">
             <a:avLst/>
@@ -4727,7 +4511,7 @@
         <p:spPr>
           <a:xfrm>
             <a:off x="960120" y="1828800"/>
-            <a:ext cx="2834640" cy="4297680"/>
+            <a:ext cx="4663440" cy="1920240"/>
           </a:xfrm>
           <a:prstGeom prst="rect">
             <a:avLst/>
@@ -4741,116 +4525,86 @@
           <a:lstStyle/>
           <a:p>
             <a:pPr>
-              <a:defRPr sz="1500" b="1">
+              <a:defRPr sz="1400" b="1">
                 <a:solidFill>
                   <a:srgbClr val="38BDF8"/>
                 </a:solidFill>
               </a:defRPr>
             </a:pPr>
             <a:r>
-              <a:t>4 &amp; 5. Git Commit &amp; CI</a:t>
+              <a:t>3. PostgreSQL Relational Persistence</a:t>
             </a:r>
           </a:p>
           <a:p>
             <a:pPr>
               <a:defRPr sz="1000" b="1">
                 <a:solidFill>
-                  <a:srgbClr val="38BDF8"/>
-                </a:solidFill>
-              </a:defRPr>
-            </a:pPr>
-            <a:r>
-              <a:t>[PARTS 4 &amp; 5: CI/CD]</a:t>
-            </a:r>
-          </a:p>
-          <a:p>
-            <a:pPr>
-              <a:spcAft>
-                <a:spcPts val="400"/>
-              </a:spcAft>
-              <a:defRPr sz="1100">
-                <a:solidFill>
-                  <a:srgbClr val="F8FAFC"/>
-                </a:solidFill>
-              </a:defRPr>
-            </a:pPr>
-            <a:r>
-              <a:t>•  Git version control workflow on branch 'main'</a:t>
-            </a:r>
-          </a:p>
-          <a:p>
-            <a:pPr>
-              <a:spcAft>
-                <a:spcPts val="400"/>
-              </a:spcAft>
-              <a:defRPr sz="1100">
-                <a:solidFill>
-                  <a:srgbClr val="F8FAFC"/>
-                </a:solidFill>
-              </a:defRPr>
-            </a:pPr>
-            <a:r>
-              <a:t>•  GitHub Actions automated pipeline (.github/workflows/ci-cd.yml)</a:t>
-            </a:r>
-          </a:p>
-          <a:p>
-            <a:pPr>
-              <a:spcAft>
-                <a:spcPts val="400"/>
-              </a:spcAft>
-              <a:defRPr sz="1100">
-                <a:solidFill>
-                  <a:srgbClr val="F8FAFC"/>
-                </a:solidFill>
-              </a:defRPr>
-            </a:pPr>
-            <a:r>
-              <a:t>•  Automated Pytest backend validation with test coverage</a:t>
-            </a:r>
-          </a:p>
-          <a:p>
-            <a:pPr>
-              <a:spcAft>
-                <a:spcPts val="400"/>
-              </a:spcAft>
-              <a:defRPr sz="1100">
-                <a:solidFill>
-                  <a:srgbClr val="F8FAFC"/>
-                </a:solidFill>
-              </a:defRPr>
-            </a:pPr>
-            <a:r>
-              <a:t>•  Node.js 22 frontend Vite production compilation check</a:t>
-            </a:r>
-          </a:p>
-          <a:p>
-            <a:pPr>
-              <a:spcAft>
-                <a:spcPts val="400"/>
-              </a:spcAft>
-              <a:defRPr sz="1100">
-                <a:solidFill>
-                  <a:srgbClr val="F8FAFC"/>
-                </a:solidFill>
-              </a:defRPr>
-            </a:pPr>
-            <a:r>
-              <a:t>•  Strict fail-fast quality gate on every commit</a:t>
-            </a:r>
-          </a:p>
-          <a:p>
-            <a:pPr>
-              <a:spcAft>
-                <a:spcPts val="400"/>
-              </a:spcAft>
-              <a:defRPr sz="1100">
-                <a:solidFill>
-                  <a:srgbClr val="F8FAFC"/>
-                </a:solidFill>
-              </a:defRPr>
-            </a:pPr>
-            <a:r>
-              <a:t>•  Commit SHA tagging ensures 100% build traceability</a:t>
+                  <a:srgbClr val="34D399"/>
+                </a:solidFill>
+              </a:defRPr>
+            </a:pPr>
+            <a:r>
+              <a:t>[PART 3: DATABASE]</a:t>
+            </a:r>
+          </a:p>
+          <a:p>
+            <a:pPr>
+              <a:spcAft>
+                <a:spcPts val="300"/>
+              </a:spcAft>
+              <a:defRPr sz="1050">
+                <a:solidFill>
+                  <a:srgbClr val="F8FAFC"/>
+                </a:solidFill>
+              </a:defRPr>
+            </a:pPr>
+            <a:r>
+              <a:t>• Stateful workload deployed in Kubernetes taskboard namespace</a:t>
+            </a:r>
+          </a:p>
+          <a:p>
+            <a:pPr>
+              <a:spcAft>
+                <a:spcPts val="300"/>
+              </a:spcAft>
+              <a:defRPr sz="1050">
+                <a:solidFill>
+                  <a:srgbClr val="F8FAFC"/>
+                </a:solidFill>
+              </a:defRPr>
+            </a:pPr>
+            <a:r>
+              <a:t>• SQLAlchemy ORM with strict Pydantic schemas</a:t>
+            </a:r>
+          </a:p>
+          <a:p>
+            <a:pPr>
+              <a:spcAft>
+                <a:spcPts val="300"/>
+              </a:spcAft>
+              <a:defRPr sz="1050">
+                <a:solidFill>
+                  <a:srgbClr val="F8FAFC"/>
+                </a:solidFill>
+              </a:defRPr>
+            </a:pPr>
+            <a:r>
+              <a:t>• Persistent tasks verified directly via psql CLI in pod</a:t>
+            </a:r>
+          </a:p>
+          <a:p>
+            <a:pPr>
+              <a:spcAft>
+                <a:spcPts val="300"/>
+              </a:spcAft>
+              <a:defRPr sz="1050">
+                <a:solidFill>
+                  <a:srgbClr val="F8FAFC"/>
+                </a:solidFill>
+              </a:defRPr>
+            </a:pPr>
+            <a:r>
+              <a:t>• Columns: id, title, subject, priority, status, progress, created_at</a:t>
             </a:r>
           </a:p>
         </p:txBody>
@@ -4863,8 +4617,8 @@
         </p:nvSpPr>
         <p:spPr>
           <a:xfrm>
-            <a:off x="4389120" y="1645920"/>
-            <a:ext cx="3291840" cy="4663440"/>
+            <a:off x="731520" y="4114800"/>
+            <a:ext cx="5120640" cy="2194560"/>
           </a:xfrm>
           <a:prstGeom prst="roundRect">
             <a:avLst/>
@@ -4908,8 +4662,8 @@
         </p:nvSpPr>
         <p:spPr>
           <a:xfrm>
-            <a:off x="4617720" y="1828800"/>
-            <a:ext cx="2834640" cy="4297680"/>
+            <a:off x="960120" y="4297680"/>
+            <a:ext cx="4663440" cy="1828800"/>
           </a:xfrm>
           <a:prstGeom prst="rect">
             <a:avLst/>
@@ -4923,302 +4677,138 @@
           <a:lstStyle/>
           <a:p>
             <a:pPr>
-              <a:defRPr sz="1500" b="1">
+              <a:defRPr sz="1400" b="1">
                 <a:solidFill>
                   <a:srgbClr val="38BDF8"/>
                 </a:solidFill>
               </a:defRPr>
             </a:pPr>
             <a:r>
-              <a:t>6. Multi-Stage Docker Builds</a:t>
+              <a:t>4 &amp; 5. Git Commit &amp; GitHub Actions CI</a:t>
             </a:r>
           </a:p>
           <a:p>
             <a:pPr>
               <a:defRPr sz="1000" b="1">
                 <a:solidFill>
-                  <a:srgbClr val="6366F1"/>
-                </a:solidFill>
-              </a:defRPr>
-            </a:pPr>
-            <a:r>
-              <a:t>[PART 6: DOCKER]</a:t>
-            </a:r>
-          </a:p>
-          <a:p>
-            <a:pPr>
-              <a:spcAft>
-                <a:spcPts val="400"/>
-              </a:spcAft>
-              <a:defRPr sz="1100">
-                <a:solidFill>
-                  <a:srgbClr val="F8FAFC"/>
-                </a:solidFill>
-              </a:defRPr>
-            </a:pPr>
-            <a:r>
-              <a:t>•  Backend: python:3.12-slim base with non-root security</a:t>
-            </a:r>
-          </a:p>
-          <a:p>
-            <a:pPr>
-              <a:spcAft>
-                <a:spcPts val="400"/>
-              </a:spcAft>
-              <a:defRPr sz="1100">
-                <a:solidFill>
-                  <a:srgbClr val="F8FAFC"/>
-                </a:solidFill>
-              </a:defRPr>
-            </a:pPr>
-            <a:r>
-              <a:t>•  Frontend: Multi-stage node:22-alpine build + nginx:alpine</a:t>
-            </a:r>
-          </a:p>
-          <a:p>
-            <a:pPr>
-              <a:spcAft>
-                <a:spcPts val="400"/>
-              </a:spcAft>
-              <a:defRPr sz="1100">
-                <a:solidFill>
-                  <a:srgbClr val="F8FAFC"/>
-                </a:solidFill>
-              </a:defRPr>
-            </a:pPr>
-            <a:r>
-              <a:t>•  Unprivileged NGINX configuration listening on 8080</a:t>
-            </a:r>
-          </a:p>
-          <a:p>
-            <a:pPr>
-              <a:spcAft>
-                <a:spcPts val="400"/>
-              </a:spcAft>
-              <a:defRPr sz="1100">
-                <a:solidFill>
-                  <a:srgbClr val="F8FAFC"/>
-                </a:solidFill>
-              </a:defRPr>
-            </a:pPr>
-            <a:r>
-              <a:t>•  Optimized container layers reducing footprint to &lt;150MB</a:t>
-            </a:r>
-          </a:p>
-          <a:p>
-            <a:pPr>
-              <a:spcAft>
-                <a:spcPts val="400"/>
-              </a:spcAft>
-              <a:defRPr sz="1100">
-                <a:solidFill>
-                  <a:srgbClr val="F8FAFC"/>
-                </a:solidFill>
-              </a:defRPr>
-            </a:pPr>
-            <a:r>
-              <a:t>•  Explicit .dockerignore preventing secret leakage</a:t>
-            </a:r>
-          </a:p>
-          <a:p>
-            <a:pPr>
-              <a:spcAft>
-                <a:spcPts val="400"/>
-              </a:spcAft>
-              <a:defRPr sz="1100">
-                <a:solidFill>
-                  <a:srgbClr val="F8FAFC"/>
-                </a:solidFill>
-              </a:defRPr>
-            </a:pPr>
-            <a:r>
-              <a:t>•  Reproducible builds across local, CI, and production</a:t>
-            </a:r>
-          </a:p>
-        </p:txBody>
-      </p:sp>
-      <p:sp>
-        <p:nvSpPr>
-          <p:cNvPr id="8" name="Rounded Rectangle 7"/>
-          <p:cNvSpPr/>
+                  <a:srgbClr val="38BDF8"/>
+                </a:solidFill>
+              </a:defRPr>
+            </a:pPr>
+            <a:r>
+              <a:t>[PARTS 4 &amp; 5: GIT &amp; CI]</a:t>
+            </a:r>
+          </a:p>
+          <a:p>
+            <a:pPr>
+              <a:spcAft>
+                <a:spcPts val="300"/>
+              </a:spcAft>
+              <a:defRPr sz="1050">
+                <a:solidFill>
+                  <a:srgbClr val="F8FAFC"/>
+                </a:solidFill>
+              </a:defRPr>
+            </a:pPr>
+            <a:r>
+              <a:t>• Automated trigger on push to branch 'main'</a:t>
+            </a:r>
+          </a:p>
+          <a:p>
+            <a:pPr>
+              <a:spcAft>
+                <a:spcPts val="300"/>
+              </a:spcAft>
+              <a:defRPr sz="1050">
+                <a:solidFill>
+                  <a:srgbClr val="F8FAFC"/>
+                </a:solidFill>
+              </a:defRPr>
+            </a:pPr>
+            <a:r>
+              <a:t>• Pytest execution: 12 unit &amp; integration tests passing in 0.50s</a:t>
+            </a:r>
+          </a:p>
+          <a:p>
+            <a:pPr>
+              <a:spcAft>
+                <a:spcPts val="300"/>
+              </a:spcAft>
+              <a:defRPr sz="1050">
+                <a:solidFill>
+                  <a:srgbClr val="F8FAFC"/>
+                </a:solidFill>
+              </a:defRPr>
+            </a:pPr>
+            <a:r>
+              <a:t>• Vite client production compilation and artifact verification</a:t>
+            </a:r>
+          </a:p>
+          <a:p>
+            <a:pPr>
+              <a:spcAft>
+                <a:spcPts val="300"/>
+              </a:spcAft>
+              <a:defRPr sz="1050">
+                <a:solidFill>
+                  <a:srgbClr val="F8FAFC"/>
+                </a:solidFill>
+              </a:defRPr>
+            </a:pPr>
+            <a:r>
+              <a:t>• Traceable Git commit SHA tagging for container images</a:t>
+            </a:r>
+          </a:p>
+        </p:txBody>
+      </p:sp>
+      <p:pic>
+        <p:nvPicPr>
+          <p:cNvPr id="8" name="Picture 7" descr="03-postgresql-database-table.png"/>
+          <p:cNvPicPr>
+            <a:picLocks noChangeAspect="1"/>
+          </p:cNvPicPr>
           <p:nvPr/>
-        </p:nvSpPr>
-        <p:spPr>
-          <a:xfrm>
-            <a:off x="8046720" y="1645920"/>
-            <a:ext cx="3291840" cy="4663440"/>
-          </a:xfrm>
-          <a:prstGeom prst="roundRect">
-            <a:avLst/>
-          </a:prstGeom>
-          <a:solidFill>
-            <a:srgbClr val="1E293B"/>
-          </a:solidFill>
-          <a:ln w="12700">
-            <a:solidFill>
-              <a:srgbClr val="334155"/>
-            </a:solidFill>
-          </a:ln>
-        </p:spPr>
-        <p:style>
-          <a:lnRef idx="1">
-            <a:schemeClr val="accent1"/>
-          </a:lnRef>
-          <a:fillRef idx="3">
-            <a:schemeClr val="accent1"/>
-          </a:fillRef>
-          <a:effectRef idx="2">
-            <a:schemeClr val="accent1"/>
-          </a:effectRef>
-          <a:fontRef idx="minor">
-            <a:schemeClr val="lt1"/>
-          </a:fontRef>
-        </p:style>
-        <p:txBody>
-          <a:bodyPr rtlCol="0" anchor="ctr"/>
-          <a:lstStyle/>
-          <a:p>
-            <a:pPr algn="ctr"/>
-          </a:p>
-        </p:txBody>
-      </p:sp>
-      <p:sp>
-        <p:nvSpPr>
-          <p:cNvPr id="9" name="TextBox 8"/>
-          <p:cNvSpPr txBox="1"/>
-          <p:nvPr/>
-        </p:nvSpPr>
-        <p:spPr>
-          <a:xfrm>
-            <a:off x="8275320" y="1828800"/>
-            <a:ext cx="2834640" cy="4297680"/>
+        </p:nvPicPr>
+        <p:blipFill>
+          <a:blip r:embed="rId2"/>
+          <a:stretch>
+            <a:fillRect/>
+          </a:stretch>
+        </p:blipFill>
+        <p:spPr>
+          <a:xfrm>
+            <a:off x="6217920" y="1645920"/>
+            <a:ext cx="5303520" cy="2286000"/>
           </a:xfrm>
           <a:prstGeom prst="rect">
             <a:avLst/>
           </a:prstGeom>
-          <a:noFill/>
-        </p:spPr>
-        <p:txBody>
-          <a:bodyPr wrap="square" lIns="0" tIns="0" rIns="0" bIns="0">
-            <a:spAutoFit/>
-          </a:bodyPr>
-          <a:lstStyle/>
-          <a:p>
-            <a:pPr>
-              <a:defRPr sz="1500" b="1">
-                <a:solidFill>
-                  <a:srgbClr val="38BDF8"/>
-                </a:solidFill>
-              </a:defRPr>
-            </a:pPr>
-            <a:r>
-              <a:t>8. Container Registry (GHCR)</a:t>
-            </a:r>
-          </a:p>
-          <a:p>
-            <a:pPr>
-              <a:defRPr sz="1000" b="1">
-                <a:solidFill>
-                  <a:srgbClr val="34D399"/>
-                </a:solidFill>
-              </a:defRPr>
-            </a:pPr>
-            <a:r>
-              <a:t>[PART 8: REGISTRY]</a:t>
-            </a:r>
-          </a:p>
-          <a:p>
-            <a:pPr>
-              <a:spcAft>
-                <a:spcPts val="400"/>
-              </a:spcAft>
-              <a:defRPr sz="1100">
-                <a:solidFill>
-                  <a:srgbClr val="F8FAFC"/>
-                </a:solidFill>
-              </a:defRPr>
-            </a:pPr>
-            <a:r>
-              <a:t>•  Hosted on GitHub Container Registry (ghcr.io)</a:t>
-            </a:r>
-          </a:p>
-          <a:p>
-            <a:pPr>
-              <a:spcAft>
-                <a:spcPts val="400"/>
-              </a:spcAft>
-              <a:defRPr sz="1100">
-                <a:solidFill>
-                  <a:srgbClr val="F8FAFC"/>
-                </a:solidFill>
-              </a:defRPr>
-            </a:pPr>
-            <a:r>
-              <a:t>•  ghcr.io/shubh-aarambh/studytrack-backend</a:t>
-            </a:r>
-          </a:p>
-          <a:p>
-            <a:pPr>
-              <a:spcAft>
-                <a:spcPts val="400"/>
-              </a:spcAft>
-              <a:defRPr sz="1100">
-                <a:solidFill>
-                  <a:srgbClr val="F8FAFC"/>
-                </a:solidFill>
-              </a:defRPr>
-            </a:pPr>
-            <a:r>
-              <a:t>•  ghcr.io/shubh-aarambh/studytrack-frontend</a:t>
-            </a:r>
-          </a:p>
-          <a:p>
-            <a:pPr>
-              <a:spcAft>
-                <a:spcPts val="400"/>
-              </a:spcAft>
-              <a:defRPr sz="1100">
-                <a:solidFill>
-                  <a:srgbClr val="F8FAFC"/>
-                </a:solidFill>
-              </a:defRPr>
-            </a:pPr>
-            <a:r>
-              <a:t>•  Dual tagging: Git commit SHA and 'latest'</a:t>
-            </a:r>
-          </a:p>
-          <a:p>
-            <a:pPr>
-              <a:spcAft>
-                <a:spcPts val="400"/>
-              </a:spcAft>
-              <a:defRPr sz="1100">
-                <a:solidFill>
-                  <a:srgbClr val="F8FAFC"/>
-                </a:solidFill>
-              </a:defRPr>
-            </a:pPr>
-            <a:r>
-              <a:t>•  Immutable artifact store for Kubernetes node pulls</a:t>
-            </a:r>
-          </a:p>
-          <a:p>
-            <a:pPr>
-              <a:spcAft>
-                <a:spcPts val="400"/>
-              </a:spcAft>
-              <a:defRPr sz="1100">
-                <a:solidFill>
-                  <a:srgbClr val="F8FAFC"/>
-                </a:solidFill>
-              </a:defRPr>
-            </a:pPr>
-            <a:r>
-              <a:t>•  Integrates seamlessly with GitHub fine-grained tokens</a:t>
-            </a:r>
-          </a:p>
-        </p:txBody>
-      </p:sp>
+        </p:spPr>
+      </p:pic>
+      <p:pic>
+        <p:nvPicPr>
+          <p:cNvPr id="9" name="Picture 8" descr="05-ci-pipeline-tests.png"/>
+          <p:cNvPicPr>
+            <a:picLocks noChangeAspect="1"/>
+          </p:cNvPicPr>
+          <p:nvPr/>
+        </p:nvPicPr>
+        <p:blipFill>
+          <a:blip r:embed="rId3"/>
+          <a:stretch>
+            <a:fillRect/>
+          </a:stretch>
+        </p:blipFill>
+        <p:spPr>
+          <a:xfrm>
+            <a:off x="6217920" y="4114800"/>
+            <a:ext cx="5303520" cy="2194560"/>
+          </a:xfrm>
+          <a:prstGeom prst="rect">
+            <a:avLst/>
+          </a:prstGeom>
+        </p:spPr>
+      </p:pic>
     </p:spTree>
   </p:cSld>
   <p:clrMapOvr>
@@ -5315,14 +4905,14 @@
           </a:p>
           <a:p>
             <a:pPr>
-              <a:defRPr sz="2400" b="1">
-                <a:solidFill>
-                  <a:srgbClr val="F8FAFC"/>
-                </a:solidFill>
-              </a:defRPr>
-            </a:pPr>
-            <a:r>
-              <a:t>Part 7 &amp; 9 — Trivy Security Scanning &amp; Terraform AWS IaC</a:t>
+              <a:defRPr sz="2200" b="1">
+                <a:solidFill>
+                  <a:srgbClr val="F8FAFC"/>
+                </a:solidFill>
+              </a:defRPr>
+            </a:pPr>
+            <a:r>
+              <a:t>Part 6, 7, 8 — Docker Packaging, Trivy Security Scan &amp; GHCR</a:t>
             </a:r>
           </a:p>
         </p:txBody>
@@ -5336,7 +4926,7 @@
         <p:spPr>
           <a:xfrm>
             <a:off x="731520" y="1645920"/>
-            <a:ext cx="5120640" cy="4663440"/>
+            <a:ext cx="5120640" cy="2286000"/>
           </a:xfrm>
           <a:prstGeom prst="roundRect">
             <a:avLst/>
@@ -5381,7 +4971,7 @@
         <p:spPr>
           <a:xfrm>
             <a:off x="960120" y="1828800"/>
-            <a:ext cx="4663440" cy="4297680"/>
+            <a:ext cx="4663440" cy="1920240"/>
           </a:xfrm>
           <a:prstGeom prst="rect">
             <a:avLst/>
@@ -5395,131 +4985,86 @@
           <a:lstStyle/>
           <a:p>
             <a:pPr>
-              <a:defRPr sz="1500" b="1">
+              <a:defRPr sz="1400" b="1">
                 <a:solidFill>
                   <a:srgbClr val="38BDF8"/>
                 </a:solidFill>
               </a:defRPr>
             </a:pPr>
             <a:r>
-              <a:t>7. Trivy Security Scanning</a:t>
+              <a:t>6 &amp; 8. Docker Builds &amp; GHCR Registry</a:t>
             </a:r>
           </a:p>
           <a:p>
             <a:pPr>
               <a:defRPr sz="1000" b="1">
                 <a:solidFill>
-                  <a:srgbClr val="FBBF24"/>
-                </a:solidFill>
-              </a:defRPr>
-            </a:pPr>
-            <a:r>
-              <a:t>[PART 7: SECURITY]</a:t>
-            </a:r>
-          </a:p>
-          <a:p>
-            <a:pPr>
-              <a:spcAft>
-                <a:spcPts val="400"/>
-              </a:spcAft>
-              <a:defRPr sz="1100">
-                <a:solidFill>
-                  <a:srgbClr val="F8FAFC"/>
-                </a:solidFill>
-              </a:defRPr>
-            </a:pPr>
-            <a:r>
-              <a:t>•  Automated static analysis of container images in CI pipeline</a:t>
-            </a:r>
-          </a:p>
-          <a:p>
-            <a:pPr>
-              <a:spcAft>
-                <a:spcPts val="400"/>
-              </a:spcAft>
-              <a:defRPr sz="1100">
-                <a:solidFill>
-                  <a:srgbClr val="F8FAFC"/>
-                </a:solidFill>
-              </a:defRPr>
-            </a:pPr>
-            <a:r>
-              <a:t>•  Scans OS packages and application dependencies for CVEs</a:t>
-            </a:r>
-          </a:p>
-          <a:p>
-            <a:pPr>
-              <a:spcAft>
-                <a:spcPts val="400"/>
-              </a:spcAft>
-              <a:defRPr sz="1100">
-                <a:solidFill>
-                  <a:srgbClr val="F8FAFC"/>
-                </a:solidFill>
-              </a:defRPr>
-            </a:pPr>
-            <a:r>
-              <a:t>•  Severity filter: HIGH, CRITICAL vulnerabilities enforced</a:t>
-            </a:r>
-          </a:p>
-          <a:p>
-            <a:pPr>
-              <a:spcAft>
-                <a:spcPts val="400"/>
-              </a:spcAft>
-              <a:defRPr sz="1100">
-                <a:solidFill>
-                  <a:srgbClr val="F8FAFC"/>
-                </a:solidFill>
-              </a:defRPr>
-            </a:pPr>
-            <a:r>
-              <a:t>•  Zero-tolerance policy: Build fails if unfixed critical CVE exists</a:t>
-            </a:r>
-          </a:p>
-          <a:p>
-            <a:pPr>
-              <a:spcAft>
-                <a:spcPts val="400"/>
-              </a:spcAft>
-              <a:defRPr sz="1100">
-                <a:solidFill>
-                  <a:srgbClr val="F8FAFC"/>
-                </a:solidFill>
-              </a:defRPr>
-            </a:pPr>
-            <a:r>
-              <a:t>•  Backend scan: 0 critical vulnerabilities found</a:t>
-            </a:r>
-          </a:p>
-          <a:p>
-            <a:pPr>
-              <a:spcAft>
-                <a:spcPts val="400"/>
-              </a:spcAft>
-              <a:defRPr sz="1100">
-                <a:solidFill>
-                  <a:srgbClr val="F8FAFC"/>
-                </a:solidFill>
-              </a:defRPr>
-            </a:pPr>
-            <a:r>
-              <a:t>•  Frontend scan: 0 critical vulnerabilities found</a:t>
-            </a:r>
-          </a:p>
-          <a:p>
-            <a:pPr>
-              <a:spcAft>
-                <a:spcPts val="400"/>
-              </a:spcAft>
-              <a:defRPr sz="1100">
-                <a:solidFill>
-                  <a:srgbClr val="F8FAFC"/>
-                </a:solidFill>
-              </a:defRPr>
-            </a:pPr>
-            <a:r>
-              <a:t>•  SBOM generation and compliance-ready security posture</a:t>
+                  <a:srgbClr val="38BDF8"/>
+                </a:solidFill>
+              </a:defRPr>
+            </a:pPr>
+            <a:r>
+              <a:t>[PARTS 6 &amp; 8: DOCKER &amp; REGISTRY]</a:t>
+            </a:r>
+          </a:p>
+          <a:p>
+            <a:pPr>
+              <a:spcAft>
+                <a:spcPts val="300"/>
+              </a:spcAft>
+              <a:defRPr sz="1050">
+                <a:solidFill>
+                  <a:srgbClr val="F8FAFC"/>
+                </a:solidFill>
+              </a:defRPr>
+            </a:pPr>
+            <a:r>
+              <a:t>• Backend: python:3.12-slim base image (142 MB)</a:t>
+            </a:r>
+          </a:p>
+          <a:p>
+            <a:pPr>
+              <a:spcAft>
+                <a:spcPts val="300"/>
+              </a:spcAft>
+              <a:defRPr sz="1050">
+                <a:solidFill>
+                  <a:srgbClr val="F8FAFC"/>
+                </a:solidFill>
+              </a:defRPr>
+            </a:pPr>
+            <a:r>
+              <a:t>• Frontend: Multi-stage node:22 build + unprivileged nginx (28 MB)</a:t>
+            </a:r>
+          </a:p>
+          <a:p>
+            <a:pPr>
+              <a:spcAft>
+                <a:spcPts val="300"/>
+              </a:spcAft>
+              <a:defRPr sz="1050">
+                <a:solidFill>
+                  <a:srgbClr val="F8FAFC"/>
+                </a:solidFill>
+              </a:defRPr>
+            </a:pPr>
+            <a:r>
+              <a:t>• Published to GitHub Container Registry (ghcr.io)</a:t>
+            </a:r>
+          </a:p>
+          <a:p>
+            <a:pPr>
+              <a:spcAft>
+                <a:spcPts val="300"/>
+              </a:spcAft>
+              <a:defRPr sz="1050">
+                <a:solidFill>
+                  <a:srgbClr val="F8FAFC"/>
+                </a:solidFill>
+              </a:defRPr>
+            </a:pPr>
+            <a:r>
+              <a:t>• Tagged with full commit SHA and 'latest' for production parity</a:t>
             </a:r>
           </a:p>
         </p:txBody>
@@ -5532,8 +5077,8 @@
         </p:nvSpPr>
         <p:spPr>
           <a:xfrm>
-            <a:off x="6217920" y="1645920"/>
-            <a:ext cx="5212080" cy="4663440"/>
+            <a:off x="731520" y="4114800"/>
+            <a:ext cx="5120640" cy="2194560"/>
           </a:xfrm>
           <a:prstGeom prst="roundRect">
             <a:avLst/>
@@ -5577,8 +5122,8 @@
         </p:nvSpPr>
         <p:spPr>
           <a:xfrm>
-            <a:off x="6446520" y="1828800"/>
-            <a:ext cx="4754880" cy="4297680"/>
+            <a:off x="960120" y="4297680"/>
+            <a:ext cx="4663440" cy="1828800"/>
           </a:xfrm>
           <a:prstGeom prst="rect">
             <a:avLst/>
@@ -5592,135 +5137,138 @@
           <a:lstStyle/>
           <a:p>
             <a:pPr>
-              <a:defRPr sz="1500" b="1">
+              <a:defRPr sz="1400" b="1">
                 <a:solidFill>
                   <a:srgbClr val="38BDF8"/>
                 </a:solidFill>
               </a:defRPr>
             </a:pPr>
             <a:r>
-              <a:t>9. Terraform AWS Infrastructure</a:t>
+              <a:t>7. Trivy Static Security Scanning</a:t>
             </a:r>
           </a:p>
           <a:p>
             <a:pPr>
               <a:defRPr sz="1000" b="1">
                 <a:solidFill>
-                  <a:srgbClr val="38BDF8"/>
-                </a:solidFill>
-              </a:defRPr>
-            </a:pPr>
-            <a:r>
-              <a:t>[PART 9: TERRAFORM]</a:t>
-            </a:r>
-          </a:p>
-          <a:p>
-            <a:pPr>
-              <a:spcAft>
-                <a:spcPts val="400"/>
-              </a:spcAft>
-              <a:defRPr sz="1100">
-                <a:solidFill>
-                  <a:srgbClr val="F8FAFC"/>
-                </a:solidFill>
-              </a:defRPr>
-            </a:pPr>
-            <a:r>
-              <a:t>•  Modular infrastructure code organized in terraform/</a:t>
-            </a:r>
-          </a:p>
-          <a:p>
-            <a:pPr>
-              <a:spcAft>
-                <a:spcPts val="400"/>
-              </a:spcAft>
-              <a:defRPr sz="1100">
-                <a:solidFill>
-                  <a:srgbClr val="F8FAFC"/>
-                </a:solidFill>
-              </a:defRPr>
-            </a:pPr>
-            <a:r>
-              <a:t>•  AWS VPC: 2 Public subnets, 2 Private subnets, NAT Gateway</a:t>
-            </a:r>
-          </a:p>
-          <a:p>
-            <a:pPr>
-              <a:spcAft>
-                <a:spcPts val="400"/>
-              </a:spcAft>
-              <a:defRPr sz="1100">
-                <a:solidFill>
-                  <a:srgbClr val="F8FAFC"/>
-                </a:solidFill>
-              </a:defRPr>
-            </a:pPr>
-            <a:r>
-              <a:t>•  Amazon EKS 1.31: Fully managed control plane with OIDC</a:t>
-            </a:r>
-          </a:p>
-          <a:p>
-            <a:pPr>
-              <a:spcAft>
-                <a:spcPts val="400"/>
-              </a:spcAft>
-              <a:defRPr sz="1100">
-                <a:solidFill>
-                  <a:srgbClr val="F8FAFC"/>
-                </a:solidFill>
-              </a:defRPr>
-            </a:pPr>
-            <a:r>
-              <a:t>•  EKS Node Group: EC2 auto-scaling nodes in private subnets</a:t>
-            </a:r>
-          </a:p>
-          <a:p>
-            <a:pPr>
-              <a:spcAft>
-                <a:spcPts val="400"/>
-              </a:spcAft>
-              <a:defRPr sz="1100">
-                <a:solidFill>
-                  <a:srgbClr val="F8FAFC"/>
-                </a:solidFill>
-              </a:defRPr>
-            </a:pPr>
-            <a:r>
-              <a:t>•  Security Groups: Strict least-privilege ingress/egress rules</a:t>
-            </a:r>
-          </a:p>
-          <a:p>
-            <a:pPr>
-              <a:spcAft>
-                <a:spcPts val="400"/>
-              </a:spcAft>
-              <a:defRPr sz="1100">
-                <a:solidFill>
-                  <a:srgbClr val="F8FAFC"/>
-                </a:solidFill>
-              </a:defRPr>
-            </a:pPr>
-            <a:r>
-              <a:t>•  KMS Encryption: Envelope encryption enabled for K8s Secrets</a:t>
-            </a:r>
-          </a:p>
-          <a:p>
-            <a:pPr>
-              <a:spcAft>
-                <a:spcPts val="400"/>
-              </a:spcAft>
-              <a:defRPr sz="1100">
-                <a:solidFill>
-                  <a:srgbClr val="F8FAFC"/>
-                </a:solidFill>
-              </a:defRPr>
-            </a:pPr>
-            <a:r>
-              <a:t>•  IAM Access Entries: Granular RBAC binding for cluster administration</a:t>
-            </a:r>
-          </a:p>
-        </p:txBody>
-      </p:sp>
+                  <a:srgbClr val="FBBF24"/>
+                </a:solidFill>
+              </a:defRPr>
+            </a:pPr>
+            <a:r>
+              <a:t>[PART 7: SECURITY]</a:t>
+            </a:r>
+          </a:p>
+          <a:p>
+            <a:pPr>
+              <a:spcAft>
+                <a:spcPts val="300"/>
+              </a:spcAft>
+              <a:defRPr sz="1050">
+                <a:solidFill>
+                  <a:srgbClr val="F8FAFC"/>
+                </a:solidFill>
+              </a:defRPr>
+            </a:pPr>
+            <a:r>
+              <a:t>• Automated security gate in CI: fails on HIGH or CRITICAL CVEs</a:t>
+            </a:r>
+          </a:p>
+          <a:p>
+            <a:pPr>
+              <a:spcAft>
+                <a:spcPts val="300"/>
+              </a:spcAft>
+              <a:defRPr sz="1050">
+                <a:solidFill>
+                  <a:srgbClr val="F8FAFC"/>
+                </a:solidFill>
+              </a:defRPr>
+            </a:pPr>
+            <a:r>
+              <a:t>• Backend scan result: 0 HIGH / 0 CRITICAL vulnerabilities</a:t>
+            </a:r>
+          </a:p>
+          <a:p>
+            <a:pPr>
+              <a:spcAft>
+                <a:spcPts val="300"/>
+              </a:spcAft>
+              <a:defRPr sz="1050">
+                <a:solidFill>
+                  <a:srgbClr val="F8FAFC"/>
+                </a:solidFill>
+              </a:defRPr>
+            </a:pPr>
+            <a:r>
+              <a:t>• Frontend scan result: 0 HIGH / 0 CRITICAL vulnerabilities</a:t>
+            </a:r>
+          </a:p>
+          <a:p>
+            <a:pPr>
+              <a:spcAft>
+                <a:spcPts val="300"/>
+              </a:spcAft>
+              <a:defRPr sz="1050">
+                <a:solidFill>
+                  <a:srgbClr val="F8FAFC"/>
+                </a:solidFill>
+              </a:defRPr>
+            </a:pPr>
+            <a:r>
+              <a:t>• Minimal attack surface with non-root runtime permissions</a:t>
+            </a:r>
+          </a:p>
+        </p:txBody>
+      </p:sp>
+      <p:pic>
+        <p:nvPicPr>
+          <p:cNvPr id="8" name="Picture 7" descr="06-docker-images-build.png"/>
+          <p:cNvPicPr>
+            <a:picLocks noChangeAspect="1"/>
+          </p:cNvPicPr>
+          <p:nvPr/>
+        </p:nvPicPr>
+        <p:blipFill>
+          <a:blip r:embed="rId2"/>
+          <a:stretch>
+            <a:fillRect/>
+          </a:stretch>
+        </p:blipFill>
+        <p:spPr>
+          <a:xfrm>
+            <a:off x="6217920" y="1645920"/>
+            <a:ext cx="5303520" cy="2286000"/>
+          </a:xfrm>
+          <a:prstGeom prst="rect">
+            <a:avLst/>
+          </a:prstGeom>
+        </p:spPr>
+      </p:pic>
+      <p:pic>
+        <p:nvPicPr>
+          <p:cNvPr id="9" name="Picture 8" descr="07-trivy-security-scan.png"/>
+          <p:cNvPicPr>
+            <a:picLocks noChangeAspect="1"/>
+          </p:cNvPicPr>
+          <p:nvPr/>
+        </p:nvPicPr>
+        <p:blipFill>
+          <a:blip r:embed="rId3"/>
+          <a:stretch>
+            <a:fillRect/>
+          </a:stretch>
+        </p:blipFill>
+        <p:spPr>
+          <a:xfrm>
+            <a:off x="6217920" y="4114800"/>
+            <a:ext cx="5303520" cy="2194560"/>
+          </a:xfrm>
+          <a:prstGeom prst="rect">
+            <a:avLst/>
+          </a:prstGeom>
+        </p:spPr>
+      </p:pic>
     </p:spTree>
   </p:cSld>
   <p:clrMapOvr>
@@ -5817,14 +5365,14 @@
           </a:p>
           <a:p>
             <a:pPr>
-              <a:defRPr sz="2400" b="1">
-                <a:solidFill>
-                  <a:srgbClr val="F8FAFC"/>
-                </a:solidFill>
-              </a:defRPr>
-            </a:pPr>
-            <a:r>
-              <a:t>Part 10, 11, 12 — Kubernetes Workloads, Helm &amp; Ingress Routing</a:t>
+              <a:defRPr sz="2200" b="1">
+                <a:solidFill>
+                  <a:srgbClr val="F8FAFC"/>
+                </a:solidFill>
+              </a:defRPr>
+            </a:pPr>
+            <a:r>
+              <a:t>Part 9, 10, 11 — Terraform IaC, Kubernetes &amp; Helm Releases</a:t>
             </a:r>
           </a:p>
         </p:txBody>
@@ -5838,7 +5386,7 @@
         <p:spPr>
           <a:xfrm>
             <a:off x="731520" y="1645920"/>
-            <a:ext cx="3291840" cy="4663440"/>
+            <a:ext cx="5120640" cy="2286000"/>
           </a:xfrm>
           <a:prstGeom prst="roundRect">
             <a:avLst/>
@@ -5883,7 +5431,7 @@
         <p:spPr>
           <a:xfrm>
             <a:off x="960120" y="1828800"/>
-            <a:ext cx="2834640" cy="4297680"/>
+            <a:ext cx="4663440" cy="1920240"/>
           </a:xfrm>
           <a:prstGeom prst="rect">
             <a:avLst/>
@@ -5897,14 +5445,14 @@
           <a:lstStyle/>
           <a:p>
             <a:pPr>
-              <a:defRPr sz="1500" b="1">
+              <a:defRPr sz="1400" b="1">
                 <a:solidFill>
                   <a:srgbClr val="38BDF8"/>
                 </a:solidFill>
               </a:defRPr>
             </a:pPr>
             <a:r>
-              <a:t>10. Kubernetes Core</a:t>
+              <a:t>9. Terraform Infrastructure Code</a:t>
             </a:r>
           </a:p>
           <a:p>
@@ -5916,97 +5464,67 @@
               </a:defRPr>
             </a:pPr>
             <a:r>
-              <a:t>[PART 10: KUBERNETES]</a:t>
-            </a:r>
-          </a:p>
-          <a:p>
-            <a:pPr>
-              <a:spcAft>
-                <a:spcPts val="400"/>
-              </a:spcAft>
-              <a:defRPr sz="1100">
-                <a:solidFill>
-                  <a:srgbClr val="F8FAFC"/>
-                </a:solidFill>
-              </a:defRPr>
-            </a:pPr>
-            <a:r>
-              <a:t>•  Namespaces: studytrack &amp; taskboard isolation</a:t>
-            </a:r>
-          </a:p>
-          <a:p>
-            <a:pPr>
-              <a:spcAft>
-                <a:spcPts val="400"/>
-              </a:spcAft>
-              <a:defRPr sz="1100">
-                <a:solidFill>
-                  <a:srgbClr val="F8FAFC"/>
-                </a:solidFill>
-              </a:defRPr>
-            </a:pPr>
-            <a:r>
-              <a:t>•  Deployments: backend (2 replicas), frontend (2 replicas)</a:t>
-            </a:r>
-          </a:p>
-          <a:p>
-            <a:pPr>
-              <a:spcAft>
-                <a:spcPts val="400"/>
-              </a:spcAft>
-              <a:defRPr sz="1100">
-                <a:solidFill>
-                  <a:srgbClr val="F8FAFC"/>
-                </a:solidFill>
-              </a:defRPr>
-            </a:pPr>
-            <a:r>
-              <a:t>•  StatefulSet / Pod: postgres with PersistentVolumeClaim</a:t>
-            </a:r>
-          </a:p>
-          <a:p>
-            <a:pPr>
-              <a:spcAft>
-                <a:spcPts val="400"/>
-              </a:spcAft>
-              <a:defRPr sz="1100">
-                <a:solidFill>
-                  <a:srgbClr val="F8FAFC"/>
-                </a:solidFill>
-              </a:defRPr>
-            </a:pPr>
-            <a:r>
-              <a:t>•  ClusterIP Services for secure internal networking</a:t>
-            </a:r>
-          </a:p>
-          <a:p>
-            <a:pPr>
-              <a:spcAft>
-                <a:spcPts val="400"/>
-              </a:spcAft>
-              <a:defRPr sz="1100">
-                <a:solidFill>
-                  <a:srgbClr val="F8FAFC"/>
-                </a:solidFill>
-              </a:defRPr>
-            </a:pPr>
-            <a:r>
-              <a:t>•  ConfigMaps &amp; Secrets for database credential injection</a:t>
-            </a:r>
-          </a:p>
-          <a:p>
-            <a:pPr>
-              <a:spcAft>
-                <a:spcPts val="400"/>
-              </a:spcAft>
-              <a:defRPr sz="1100">
-                <a:solidFill>
-                  <a:srgbClr val="F8FAFC"/>
-                </a:solidFill>
-              </a:defRPr>
-            </a:pPr>
-            <a:r>
-              <a:t>•  Health &amp; Readiness probes verifying container lifecycle</a:t>
+              <a:t>[PART 9: TERRAFORM]</a:t>
+            </a:r>
+          </a:p>
+          <a:p>
+            <a:pPr>
+              <a:spcAft>
+                <a:spcPts val="300"/>
+              </a:spcAft>
+              <a:defRPr sz="1050">
+                <a:solidFill>
+                  <a:srgbClr val="F8FAFC"/>
+                </a:solidFill>
+              </a:defRPr>
+            </a:pPr>
+            <a:r>
+              <a:t>• Modular AWS VPC: 2 Public + 2 Private Subnets + NAT Gateway</a:t>
+            </a:r>
+          </a:p>
+          <a:p>
+            <a:pPr>
+              <a:spcAft>
+                <a:spcPts val="300"/>
+              </a:spcAft>
+              <a:defRPr sz="1050">
+                <a:solidFill>
+                  <a:srgbClr val="F8FAFC"/>
+                </a:solidFill>
+              </a:defRPr>
+            </a:pPr>
+            <a:r>
+              <a:t>• Amazon EKS 1.31 cluster with AWS KMS encryption key</a:t>
+            </a:r>
+          </a:p>
+          <a:p>
+            <a:pPr>
+              <a:spcAft>
+                <a:spcPts val="300"/>
+              </a:spcAft>
+              <a:defRPr sz="1050">
+                <a:solidFill>
+                  <a:srgbClr val="F8FAFC"/>
+                </a:solidFill>
+              </a:defRPr>
+            </a:pPr>
+            <a:r>
+              <a:t>• EKS Managed Node Group with Free Tier eligible t3.small instances</a:t>
+            </a:r>
+          </a:p>
+          <a:p>
+            <a:pPr>
+              <a:spcAft>
+                <a:spcPts val="300"/>
+              </a:spcAft>
+              <a:defRPr sz="1050">
+                <a:solidFill>
+                  <a:srgbClr val="F8FAFC"/>
+                </a:solidFill>
+              </a:defRPr>
+            </a:pPr>
+            <a:r>
+              <a:t>• IAM Access Entries &amp; ClusterAdminPolicy associated for root caller</a:t>
             </a:r>
           </a:p>
         </p:txBody>
@@ -6019,8 +5537,8 @@
         </p:nvSpPr>
         <p:spPr>
           <a:xfrm>
-            <a:off x="4389120" y="1645920"/>
-            <a:ext cx="3291840" cy="4663440"/>
+            <a:off x="731520" y="4114800"/>
+            <a:ext cx="5120640" cy="2194560"/>
           </a:xfrm>
           <a:prstGeom prst="roundRect">
             <a:avLst/>
@@ -6064,8 +5582,8 @@
         </p:nvSpPr>
         <p:spPr>
           <a:xfrm>
-            <a:off x="4617720" y="1828800"/>
-            <a:ext cx="2834640" cy="4297680"/>
+            <a:off x="960120" y="4297680"/>
+            <a:ext cx="4663440" cy="1828800"/>
           </a:xfrm>
           <a:prstGeom prst="rect">
             <a:avLst/>
@@ -6079,14 +5597,14 @@
           <a:lstStyle/>
           <a:p>
             <a:pPr>
-              <a:defRPr sz="1500" b="1">
+              <a:defRPr sz="1400" b="1">
                 <a:solidFill>
                   <a:srgbClr val="38BDF8"/>
                 </a:solidFill>
               </a:defRPr>
             </a:pPr>
             <a:r>
-              <a:t>11. Helm Charts</a:t>
+              <a:t>10 &amp; 11. Kubernetes &amp; Helm Deployment</a:t>
             </a:r>
           </a:p>
           <a:p>
@@ -6098,298 +5616,119 @@
               </a:defRPr>
             </a:pPr>
             <a:r>
-              <a:t>[PART 11: HELM]</a:t>
-            </a:r>
-          </a:p>
-          <a:p>
-            <a:pPr>
-              <a:spcAft>
-                <a:spcPts val="400"/>
-              </a:spcAft>
-              <a:defRPr sz="1100">
-                <a:solidFill>
-                  <a:srgbClr val="F8FAFC"/>
-                </a:solidFill>
-              </a:defRPr>
-            </a:pPr>
-            <a:r>
-              <a:t>•  Templated Helm chart located in helm/studytrack</a:t>
-            </a:r>
-          </a:p>
-          <a:p>
-            <a:pPr>
-              <a:spcAft>
-                <a:spcPts val="400"/>
-              </a:spcAft>
-              <a:defRPr sz="1100">
-                <a:solidFill>
-                  <a:srgbClr val="F8FAFC"/>
-                </a:solidFill>
-              </a:defRPr>
-            </a:pPr>
-            <a:r>
-              <a:t>•  Environment-specific overrides: values-dev.yaml, values-prod.yaml</a:t>
-            </a:r>
-          </a:p>
-          <a:p>
-            <a:pPr>
-              <a:spcAft>
-                <a:spcPts val="400"/>
-              </a:spcAft>
-              <a:defRPr sz="1100">
-                <a:solidFill>
-                  <a:srgbClr val="F8FAFC"/>
-                </a:solidFill>
-              </a:defRPr>
-            </a:pPr>
-            <a:r>
-              <a:t>•  Dynamic replica sizing, resource requests and limits</a:t>
-            </a:r>
-          </a:p>
-          <a:p>
-            <a:pPr>
-              <a:spcAft>
-                <a:spcPts val="400"/>
-              </a:spcAft>
-              <a:defRPr sz="1100">
-                <a:solidFill>
-                  <a:srgbClr val="F8FAFC"/>
-                </a:solidFill>
-              </a:defRPr>
-            </a:pPr>
-            <a:r>
-              <a:t>•  Integrated ServiceMonitor &amp; Ingress toggle configurations</a:t>
-            </a:r>
-          </a:p>
-          <a:p>
-            <a:pPr>
-              <a:spcAft>
-                <a:spcPts val="400"/>
-              </a:spcAft>
-              <a:defRPr sz="1100">
-                <a:solidFill>
-                  <a:srgbClr val="F8FAFC"/>
-                </a:solidFill>
-              </a:defRPr>
-            </a:pPr>
-            <a:r>
-              <a:t>•  helm upgrade --install for automated zero-downtime rollouts</a:t>
-            </a:r>
-          </a:p>
-          <a:p>
-            <a:pPr>
-              <a:spcAft>
-                <a:spcPts val="400"/>
-              </a:spcAft>
-              <a:defRPr sz="1100">
-                <a:solidFill>
-                  <a:srgbClr val="F8FAFC"/>
-                </a:solidFill>
-              </a:defRPr>
-            </a:pPr>
-            <a:r>
-              <a:t>•  Helm release history and rollback capabilities</a:t>
-            </a:r>
-          </a:p>
-        </p:txBody>
-      </p:sp>
-      <p:sp>
-        <p:nvSpPr>
-          <p:cNvPr id="8" name="Rounded Rectangle 7"/>
-          <p:cNvSpPr/>
+              <a:t>[PARTS 10 &amp; 11: K8S &amp; HELM]</a:t>
+            </a:r>
+          </a:p>
+          <a:p>
+            <a:pPr>
+              <a:spcAft>
+                <a:spcPts val="300"/>
+              </a:spcAft>
+              <a:defRPr sz="1050">
+                <a:solidFill>
+                  <a:srgbClr val="F8FAFC"/>
+                </a:solidFill>
+              </a:defRPr>
+            </a:pPr>
+            <a:r>
+              <a:t>• Namespace taskboard: backend (2 replicas), frontend (2 replicas), postgres (1)</a:t>
+            </a:r>
+          </a:p>
+          <a:p>
+            <a:pPr>
+              <a:spcAft>
+                <a:spcPts val="300"/>
+              </a:spcAft>
+              <a:defRPr sz="1050">
+                <a:solidFill>
+                  <a:srgbClr val="F8FAFC"/>
+                </a:solidFill>
+              </a:defRPr>
+            </a:pPr>
+            <a:r>
+              <a:t>• Helm chart: helm/studytrack with values overriding image tags</a:t>
+            </a:r>
+          </a:p>
+          <a:p>
+            <a:pPr>
+              <a:spcAft>
+                <a:spcPts val="300"/>
+              </a:spcAft>
+              <a:defRPr sz="1050">
+                <a:solidFill>
+                  <a:srgbClr val="F8FAFC"/>
+                </a:solidFill>
+              </a:defRPr>
+            </a:pPr>
+            <a:r>
+              <a:t>• ClusterIP services for secure internal communication</a:t>
+            </a:r>
+          </a:p>
+          <a:p>
+            <a:pPr>
+              <a:spcAft>
+                <a:spcPts val="300"/>
+              </a:spcAft>
+              <a:defRPr sz="1050">
+                <a:solidFill>
+                  <a:srgbClr val="F8FAFC"/>
+                </a:solidFill>
+              </a:defRPr>
+            </a:pPr>
+            <a:r>
+              <a:t>• Automated rolling upgrades with zero service downtime</a:t>
+            </a:r>
+          </a:p>
+        </p:txBody>
+      </p:sp>
+      <p:pic>
+        <p:nvPicPr>
+          <p:cNvPr id="8" name="Picture 7" descr="09-terraform-infrastructure.png"/>
+          <p:cNvPicPr>
+            <a:picLocks noChangeAspect="1"/>
+          </p:cNvPicPr>
           <p:nvPr/>
-        </p:nvSpPr>
-        <p:spPr>
-          <a:xfrm>
-            <a:off x="8046720" y="1645920"/>
-            <a:ext cx="3291840" cy="4663440"/>
-          </a:xfrm>
-          <a:prstGeom prst="roundRect">
-            <a:avLst/>
-          </a:prstGeom>
-          <a:solidFill>
-            <a:srgbClr val="1E293B"/>
-          </a:solidFill>
-          <a:ln w="12700">
-            <a:solidFill>
-              <a:srgbClr val="334155"/>
-            </a:solidFill>
-          </a:ln>
-        </p:spPr>
-        <p:style>
-          <a:lnRef idx="1">
-            <a:schemeClr val="accent1"/>
-          </a:lnRef>
-          <a:fillRef idx="3">
-            <a:schemeClr val="accent1"/>
-          </a:fillRef>
-          <a:effectRef idx="2">
-            <a:schemeClr val="accent1"/>
-          </a:effectRef>
-          <a:fontRef idx="minor">
-            <a:schemeClr val="lt1"/>
-          </a:fontRef>
-        </p:style>
-        <p:txBody>
-          <a:bodyPr rtlCol="0" anchor="ctr"/>
-          <a:lstStyle/>
-          <a:p>
-            <a:pPr algn="ctr"/>
-          </a:p>
-        </p:txBody>
-      </p:sp>
-      <p:sp>
-        <p:nvSpPr>
-          <p:cNvPr id="9" name="TextBox 8"/>
-          <p:cNvSpPr txBox="1"/>
-          <p:nvPr/>
-        </p:nvSpPr>
-        <p:spPr>
-          <a:xfrm>
-            <a:off x="8275320" y="1828800"/>
-            <a:ext cx="2834640" cy="4297680"/>
+        </p:nvPicPr>
+        <p:blipFill>
+          <a:blip r:embed="rId2"/>
+          <a:stretch>
+            <a:fillRect/>
+          </a:stretch>
+        </p:blipFill>
+        <p:spPr>
+          <a:xfrm>
+            <a:off x="6217920" y="1645920"/>
+            <a:ext cx="5303520" cy="2286000"/>
           </a:xfrm>
           <a:prstGeom prst="rect">
             <a:avLst/>
           </a:prstGeom>
-          <a:noFill/>
-        </p:spPr>
-        <p:txBody>
-          <a:bodyPr wrap="square" lIns="0" tIns="0" rIns="0" bIns="0">
-            <a:spAutoFit/>
-          </a:bodyPr>
-          <a:lstStyle/>
-          <a:p>
-            <a:pPr>
-              <a:defRPr sz="1500" b="1">
-                <a:solidFill>
-                  <a:srgbClr val="38BDF8"/>
-                </a:solidFill>
-              </a:defRPr>
-            </a:pPr>
-            <a:r>
-              <a:t>12. Ingress Traffic Routing</a:t>
-            </a:r>
-          </a:p>
-          <a:p>
-            <a:pPr>
-              <a:defRPr sz="1000" b="1">
-                <a:solidFill>
-                  <a:srgbClr val="34D399"/>
-                </a:solidFill>
-              </a:defRPr>
-            </a:pPr>
-            <a:r>
-              <a:t>[PART 12: INGRESS]</a:t>
-            </a:r>
-          </a:p>
-          <a:p>
-            <a:pPr>
-              <a:spcAft>
-                <a:spcPts val="400"/>
-              </a:spcAft>
-              <a:defRPr sz="1100">
-                <a:solidFill>
-                  <a:srgbClr val="F8FAFC"/>
-                </a:solidFill>
-              </a:defRPr>
-            </a:pPr>
-            <a:r>
-              <a:t>•  NGINX Ingress Controller acts as single entrypoint</a:t>
-            </a:r>
-          </a:p>
-          <a:p>
-            <a:pPr>
-              <a:spcAft>
-                <a:spcPts val="400"/>
-              </a:spcAft>
-              <a:defRPr sz="1100">
-                <a:solidFill>
-                  <a:srgbClr val="F8FAFC"/>
-                </a:solidFill>
-              </a:defRPr>
-            </a:pPr>
-            <a:r>
-              <a:t>•  Path-based routing rule:</a:t>
-            </a:r>
-          </a:p>
-          <a:p>
-            <a:pPr>
-              <a:spcAft>
-                <a:spcPts val="400"/>
-              </a:spcAft>
-              <a:defRPr sz="1100">
-                <a:solidFill>
-                  <a:srgbClr val="F8FAFC"/>
-                </a:solidFill>
-              </a:defRPr>
-            </a:pPr>
-            <a:r>
-              <a:t>•    • /api -&gt; studytrack-backend:8000</a:t>
-            </a:r>
-          </a:p>
-          <a:p>
-            <a:pPr>
-              <a:spcAft>
-                <a:spcPts val="400"/>
-              </a:spcAft>
-              <a:defRPr sz="1100">
-                <a:solidFill>
-                  <a:srgbClr val="F8FAFC"/>
-                </a:solidFill>
-              </a:defRPr>
-            </a:pPr>
-            <a:r>
-              <a:t>•    • /    -&gt; studytrack-frontend:80</a:t>
-            </a:r>
-          </a:p>
-          <a:p>
-            <a:pPr>
-              <a:spcAft>
-                <a:spcPts val="400"/>
-              </a:spcAft>
-              <a:defRPr sz="1100">
-                <a:solidFill>
-                  <a:srgbClr val="F8FAFC"/>
-                </a:solidFill>
-              </a:defRPr>
-            </a:pPr>
-            <a:r>
-              <a:t>•  External Load Balancer integration with AWS ELB</a:t>
-            </a:r>
-          </a:p>
-          <a:p>
-            <a:pPr>
-              <a:spcAft>
-                <a:spcPts val="400"/>
-              </a:spcAft>
-              <a:defRPr sz="1100">
-                <a:solidFill>
-                  <a:srgbClr val="F8FAFC"/>
-                </a:solidFill>
-              </a:defRPr>
-            </a:pPr>
-            <a:r>
-              <a:t>•  CORS header management and SSL/TLS termination support</a:t>
-            </a:r>
-          </a:p>
-          <a:p>
-            <a:pPr>
-              <a:spcAft>
-                <a:spcPts val="400"/>
-              </a:spcAft>
-              <a:defRPr sz="1100">
-                <a:solidFill>
-                  <a:srgbClr val="F8FAFC"/>
-                </a:solidFill>
-              </a:defRPr>
-            </a:pPr>
-            <a:r>
-              <a:t>•  Enables seamless client access via dedicated hostname</a:t>
-            </a:r>
-          </a:p>
-        </p:txBody>
-      </p:sp>
+        </p:spPr>
+      </p:pic>
+      <p:pic>
+        <p:nvPicPr>
+          <p:cNvPr id="9" name="Picture 8" descr="10-kubernetes-pods-services.png"/>
+          <p:cNvPicPr>
+            <a:picLocks noChangeAspect="1"/>
+          </p:cNvPicPr>
+          <p:nvPr/>
+        </p:nvPicPr>
+        <p:blipFill>
+          <a:blip r:embed="rId3"/>
+          <a:stretch>
+            <a:fillRect/>
+          </a:stretch>
+        </p:blipFill>
+        <p:spPr>
+          <a:xfrm>
+            <a:off x="6217920" y="4114800"/>
+            <a:ext cx="5303520" cy="2194560"/>
+          </a:xfrm>
+          <a:prstGeom prst="rect">
+            <a:avLst/>
+          </a:prstGeom>
+        </p:spPr>
+      </p:pic>
     </p:spTree>
   </p:cSld>
   <p:clrMapOvr>
@@ -6486,14 +5825,14 @@
           </a:p>
           <a:p>
             <a:pPr>
-              <a:defRPr sz="2400" b="1">
-                <a:solidFill>
-                  <a:srgbClr val="F8FAFC"/>
-                </a:solidFill>
-              </a:defRPr>
-            </a:pPr>
-            <a:r>
-              <a:t>Part 13, 14, 15 — Autoscaling, Observability &amp; Live Failure Simulation</a:t>
+              <a:defRPr sz="2200" b="1">
+                <a:solidFill>
+                  <a:srgbClr val="F8FAFC"/>
+                </a:solidFill>
+              </a:defRPr>
+            </a:pPr>
+            <a:r>
+              <a:t>Part 12 &amp; 13 — NGINX Ingress Routing &amp; Horizontal Pod Autoscaler</a:t>
             </a:r>
           </a:p>
         </p:txBody>
@@ -6507,7 +5846,7 @@
         <p:spPr>
           <a:xfrm>
             <a:off x="731520" y="1645920"/>
-            <a:ext cx="3291840" cy="4663440"/>
+            <a:ext cx="5120640" cy="2286000"/>
           </a:xfrm>
           <a:prstGeom prst="roundRect">
             <a:avLst/>
@@ -6552,7 +5891,7 @@
         <p:spPr>
           <a:xfrm>
             <a:off x="960120" y="1828800"/>
-            <a:ext cx="2834640" cy="4297680"/>
+            <a:ext cx="4663440" cy="1920240"/>
           </a:xfrm>
           <a:prstGeom prst="rect">
             <a:avLst/>
@@ -6566,116 +5905,86 @@
           <a:lstStyle/>
           <a:p>
             <a:pPr>
-              <a:defRPr sz="1500" b="1">
+              <a:defRPr sz="1400" b="1">
                 <a:solidFill>
                   <a:srgbClr val="38BDF8"/>
                 </a:solidFill>
               </a:defRPr>
             </a:pPr>
             <a:r>
-              <a:t>13. HPA &amp; Load Testing</a:t>
+              <a:t>12. NGINX Ingress Controller &amp; AWS ELB</a:t>
             </a:r>
           </a:p>
           <a:p>
             <a:pPr>
               <a:defRPr sz="1000" b="1">
                 <a:solidFill>
-                  <a:srgbClr val="FBBF24"/>
-                </a:solidFill>
-              </a:defRPr>
-            </a:pPr>
-            <a:r>
-              <a:t>[PART 13: HPA]</a:t>
-            </a:r>
-          </a:p>
-          <a:p>
-            <a:pPr>
-              <a:spcAft>
-                <a:spcPts val="400"/>
-              </a:spcAft>
-              <a:defRPr sz="1100">
-                <a:solidFill>
-                  <a:srgbClr val="F8FAFC"/>
-                </a:solidFill>
-              </a:defRPr>
-            </a:pPr>
-            <a:r>
-              <a:t>•  Horizontal Pod Autoscaler target: 60% CPU utilization</a:t>
-            </a:r>
-          </a:p>
-          <a:p>
-            <a:pPr>
-              <a:spcAft>
-                <a:spcPts val="400"/>
-              </a:spcAft>
-              <a:defRPr sz="1100">
-                <a:solidFill>
-                  <a:srgbClr val="F8FAFC"/>
-                </a:solidFill>
-              </a:defRPr>
-            </a:pPr>
-            <a:r>
-              <a:t>•  Scaling boundaries: min 2 pods, max 6 pods</a:t>
-            </a:r>
-          </a:p>
-          <a:p>
-            <a:pPr>
-              <a:spcAft>
-                <a:spcPts val="400"/>
-              </a:spcAft>
-              <a:defRPr sz="1100">
-                <a:solidFill>
-                  <a:srgbClr val="F8FAFC"/>
-                </a:solidFill>
-              </a:defRPr>
-            </a:pPr>
-            <a:r>
-              <a:t>•  Load testing scripts in scripts/load-test.ps1 &amp; .sh</a:t>
-            </a:r>
-          </a:p>
-          <a:p>
-            <a:pPr>
-              <a:spcAft>
-                <a:spcPts val="400"/>
-              </a:spcAft>
-              <a:defRPr sz="1100">
-                <a:solidFill>
-                  <a:srgbClr val="F8FAFC"/>
-                </a:solidFill>
-              </a:defRPr>
-            </a:pPr>
-            <a:r>
-              <a:t>•  Concurrent load generates realistic request bursts</a:t>
-            </a:r>
-          </a:p>
-          <a:p>
-            <a:pPr>
-              <a:spcAft>
-                <a:spcPts val="400"/>
-              </a:spcAft>
-              <a:defRPr sz="1100">
-                <a:solidFill>
-                  <a:srgbClr val="F8FAFC"/>
-                </a:solidFill>
-              </a:defRPr>
-            </a:pPr>
-            <a:r>
-              <a:t>•  HPA automatically detects spike and scales replicas</a:t>
-            </a:r>
-          </a:p>
-          <a:p>
-            <a:pPr>
-              <a:spcAft>
-                <a:spcPts val="400"/>
-              </a:spcAft>
-              <a:defRPr sz="1100">
-                <a:solidFill>
-                  <a:srgbClr val="F8FAFC"/>
-                </a:solidFill>
-              </a:defRPr>
-            </a:pPr>
-            <a:r>
-              <a:t>•  Graceful scale-down cooldown prevents thrashing</a:t>
+                  <a:srgbClr val="34D399"/>
+                </a:solidFill>
+              </a:defRPr>
+            </a:pPr>
+            <a:r>
+              <a:t>[PART 12: INGRESS]</a:t>
+            </a:r>
+          </a:p>
+          <a:p>
+            <a:pPr>
+              <a:spcAft>
+                <a:spcPts val="300"/>
+              </a:spcAft>
+              <a:defRPr sz="1050">
+                <a:solidFill>
+                  <a:srgbClr val="F8FAFC"/>
+                </a:solidFill>
+              </a:defRPr>
+            </a:pPr>
+            <a:r>
+              <a:t>• Single entrypoint provisioned via AWS Elastic Load Balancer (ELB)</a:t>
+            </a:r>
+          </a:p>
+          <a:p>
+            <a:pPr>
+              <a:spcAft>
+                <a:spcPts val="300"/>
+              </a:spcAft>
+              <a:defRPr sz="1050">
+                <a:solidFill>
+                  <a:srgbClr val="F8FAFC"/>
+                </a:solidFill>
+              </a:defRPr>
+            </a:pPr>
+            <a:r>
+              <a:t>• Path-based routing: /api -&gt; backend:8000, / -&gt; frontend:80</a:t>
+            </a:r>
+          </a:p>
+          <a:p>
+            <a:pPr>
+              <a:spcAft>
+                <a:spcPts val="300"/>
+              </a:spcAft>
+              <a:defRPr sz="1050">
+                <a:solidFill>
+                  <a:srgbClr val="F8FAFC"/>
+                </a:solidFill>
+              </a:defRPr>
+            </a:pPr>
+            <a:r>
+              <a:t>• Public hostname: a554166002e3d4c6bbb0bde1c641c9c1...ap-south-1.elb.amazonaws.com</a:t>
+            </a:r>
+          </a:p>
+          <a:p>
+            <a:pPr>
+              <a:spcAft>
+                <a:spcPts val="300"/>
+              </a:spcAft>
+              <a:defRPr sz="1050">
+                <a:solidFill>
+                  <a:srgbClr val="F8FAFC"/>
+                </a:solidFill>
+              </a:defRPr>
+            </a:pPr>
+            <a:r>
+              <a:t>• Tested live across internet with HTTP 200 responses</a:t>
             </a:r>
           </a:p>
         </p:txBody>
@@ -6688,8 +5997,8 @@
         </p:nvSpPr>
         <p:spPr>
           <a:xfrm>
-            <a:off x="4389120" y="1645920"/>
-            <a:ext cx="3291840" cy="4663440"/>
+            <a:off x="731520" y="4114800"/>
+            <a:ext cx="5120640" cy="2194560"/>
           </a:xfrm>
           <a:prstGeom prst="roundRect">
             <a:avLst/>
@@ -6733,8 +6042,8 @@
         </p:nvSpPr>
         <p:spPr>
           <a:xfrm>
-            <a:off x="4617720" y="1828800"/>
-            <a:ext cx="2834640" cy="4297680"/>
+            <a:off x="960120" y="4297680"/>
+            <a:ext cx="4663440" cy="1828800"/>
           </a:xfrm>
           <a:prstGeom prst="rect">
             <a:avLst/>
@@ -6748,317 +6057,138 @@
           <a:lstStyle/>
           <a:p>
             <a:pPr>
-              <a:defRPr sz="1500" b="1">
+              <a:defRPr sz="1400" b="1">
                 <a:solidFill>
                   <a:srgbClr val="38BDF8"/>
                 </a:solidFill>
               </a:defRPr>
             </a:pPr>
             <a:r>
-              <a:t>14. Prometheus &amp; Grafana</a:t>
+              <a:t>13. Horizontal Pod Autoscaler (HPA)</a:t>
             </a:r>
           </a:p>
           <a:p>
             <a:pPr>
               <a:defRPr sz="1000" b="1">
                 <a:solidFill>
-                  <a:srgbClr val="38BDF8"/>
-                </a:solidFill>
-              </a:defRPr>
-            </a:pPr>
-            <a:r>
-              <a:t>[PART 14: MONITORING]</a:t>
-            </a:r>
-          </a:p>
-          <a:p>
-            <a:pPr>
-              <a:spcAft>
-                <a:spcPts val="400"/>
-              </a:spcAft>
-              <a:defRPr sz="1100">
-                <a:solidFill>
-                  <a:srgbClr val="F8FAFC"/>
-                </a:solidFill>
-              </a:defRPr>
-            </a:pPr>
-            <a:r>
-              <a:t>•  FastAPI Instrumentator exposes metrics at /metrics</a:t>
-            </a:r>
-          </a:p>
-          <a:p>
-            <a:pPr>
-              <a:spcAft>
-                <a:spcPts val="400"/>
-              </a:spcAft>
-              <a:defRPr sz="1100">
-                <a:solidFill>
-                  <a:srgbClr val="F8FAFC"/>
-                </a:solidFill>
-              </a:defRPr>
-            </a:pPr>
-            <a:r>
-              <a:t>•  Prometheus Operator with ServiceMonitor configuration</a:t>
-            </a:r>
-          </a:p>
-          <a:p>
-            <a:pPr>
-              <a:spcAft>
-                <a:spcPts val="400"/>
-              </a:spcAft>
-              <a:defRPr sz="1100">
-                <a:solidFill>
-                  <a:srgbClr val="F8FAFC"/>
-                </a:solidFill>
-              </a:defRPr>
-            </a:pPr>
-            <a:r>
-              <a:t>•  Grafana dashboards visualize real-time cluster telemetry</a:t>
-            </a:r>
-          </a:p>
-          <a:p>
-            <a:pPr>
-              <a:spcAft>
-                <a:spcPts val="400"/>
-              </a:spcAft>
-              <a:defRPr sz="1100">
-                <a:solidFill>
-                  <a:srgbClr val="F8FAFC"/>
-                </a:solidFill>
-              </a:defRPr>
-            </a:pPr>
-            <a:r>
-              <a:t>•  Monitored KPIs: Request rate, HTTP error status, latency p95</a:t>
-            </a:r>
-          </a:p>
-          <a:p>
-            <a:pPr>
-              <a:spcAft>
-                <a:spcPts val="400"/>
-              </a:spcAft>
-              <a:defRPr sz="1100">
-                <a:solidFill>
-                  <a:srgbClr val="F8FAFC"/>
-                </a:solidFill>
-              </a:defRPr>
-            </a:pPr>
-            <a:r>
-              <a:t>•  Pod CPU &amp; memory resource consumption graphs</a:t>
-            </a:r>
-          </a:p>
-          <a:p>
-            <a:pPr>
-              <a:spcAft>
-                <a:spcPts val="400"/>
-              </a:spcAft>
-              <a:defRPr sz="1100">
-                <a:solidFill>
-                  <a:srgbClr val="F8FAFC"/>
-                </a:solidFill>
-              </a:defRPr>
-            </a:pPr>
-            <a:r>
-              <a:t>•  Proactive alerts for error spikes and pod restarts</a:t>
-            </a:r>
-          </a:p>
-        </p:txBody>
-      </p:sp>
-      <p:sp>
-        <p:nvSpPr>
-          <p:cNvPr id="8" name="Rounded Rectangle 7"/>
-          <p:cNvSpPr/>
+                  <a:srgbClr val="FBBF24"/>
+                </a:solidFill>
+              </a:defRPr>
+            </a:pPr>
+            <a:r>
+              <a:t>[PART 13: HPA]</a:t>
+            </a:r>
+          </a:p>
+          <a:p>
+            <a:pPr>
+              <a:spcAft>
+                <a:spcPts val="300"/>
+              </a:spcAft>
+              <a:defRPr sz="1050">
+                <a:solidFill>
+                  <a:srgbClr val="F8FAFC"/>
+                </a:solidFill>
+              </a:defRPr>
+            </a:pPr>
+            <a:r>
+              <a:t>• Target metric: 60% CPU utilization with Metrics Server integration</a:t>
+            </a:r>
+          </a:p>
+          <a:p>
+            <a:pPr>
+              <a:spcAft>
+                <a:spcPts val="300"/>
+              </a:spcAft>
+              <a:defRPr sz="1050">
+                <a:solidFill>
+                  <a:srgbClr val="F8FAFC"/>
+                </a:solidFill>
+              </a:defRPr>
+            </a:pPr>
+            <a:r>
+              <a:t>• Boundaries: Minimum 2 replicas, Maximum 6 replicas</a:t>
+            </a:r>
+          </a:p>
+          <a:p>
+            <a:pPr>
+              <a:spcAft>
+                <a:spcPts val="300"/>
+              </a:spcAft>
+              <a:defRPr sz="1050">
+                <a:solidFill>
+                  <a:srgbClr val="F8FAFC"/>
+                </a:solidFill>
+              </a:defRPr>
+            </a:pPr>
+            <a:r>
+              <a:t>• Tested with scripts/load-test.ps1 (~108 req/sec concurrent load)</a:t>
+            </a:r>
+          </a:p>
+          <a:p>
+            <a:pPr>
+              <a:spcAft>
+                <a:spcPts val="300"/>
+              </a:spcAft>
+              <a:defRPr sz="1050">
+                <a:solidFill>
+                  <a:srgbClr val="F8FAFC"/>
+                </a:solidFill>
+              </a:defRPr>
+            </a:pPr>
+            <a:r>
+              <a:t>• Automatic scale-up during traffic bursts and cooldown downscaling</a:t>
+            </a:r>
+          </a:p>
+        </p:txBody>
+      </p:sp>
+      <p:pic>
+        <p:nvPicPr>
+          <p:cNvPr id="8" name="Picture 7" descr="12-ingress-live-app.png"/>
+          <p:cNvPicPr>
+            <a:picLocks noChangeAspect="1"/>
+          </p:cNvPicPr>
           <p:nvPr/>
-        </p:nvSpPr>
-        <p:spPr>
-          <a:xfrm>
-            <a:off x="8046720" y="1645920"/>
-            <a:ext cx="3291840" cy="4663440"/>
-          </a:xfrm>
-          <a:prstGeom prst="roundRect">
-            <a:avLst/>
-          </a:prstGeom>
-          <a:solidFill>
-            <a:srgbClr val="1E293B"/>
-          </a:solidFill>
-          <a:ln w="12700">
-            <a:solidFill>
-              <a:srgbClr val="334155"/>
-            </a:solidFill>
-          </a:ln>
-        </p:spPr>
-        <p:style>
-          <a:lnRef idx="1">
-            <a:schemeClr val="accent1"/>
-          </a:lnRef>
-          <a:fillRef idx="3">
-            <a:schemeClr val="accent1"/>
-          </a:fillRef>
-          <a:effectRef idx="2">
-            <a:schemeClr val="accent1"/>
-          </a:effectRef>
-          <a:fontRef idx="minor">
-            <a:schemeClr val="lt1"/>
-          </a:fontRef>
-        </p:style>
-        <p:txBody>
-          <a:bodyPr rtlCol="0" anchor="ctr"/>
-          <a:lstStyle/>
-          <a:p>
-            <a:pPr algn="ctr"/>
-          </a:p>
-        </p:txBody>
-      </p:sp>
-      <p:sp>
-        <p:nvSpPr>
-          <p:cNvPr id="9" name="TextBox 8"/>
-          <p:cNvSpPr txBox="1"/>
-          <p:nvPr/>
-        </p:nvSpPr>
-        <p:spPr>
-          <a:xfrm>
-            <a:off x="8275320" y="1828800"/>
-            <a:ext cx="2834640" cy="4297680"/>
+        </p:nvPicPr>
+        <p:blipFill>
+          <a:blip r:embed="rId2"/>
+          <a:stretch>
+            <a:fillRect/>
+          </a:stretch>
+        </p:blipFill>
+        <p:spPr>
+          <a:xfrm>
+            <a:off x="6217920" y="1645920"/>
+            <a:ext cx="5303520" cy="2286000"/>
           </a:xfrm>
           <a:prstGeom prst="rect">
             <a:avLst/>
           </a:prstGeom>
-          <a:noFill/>
-        </p:spPr>
-        <p:txBody>
-          <a:bodyPr wrap="square" lIns="0" tIns="0" rIns="0" bIns="0">
-            <a:spAutoFit/>
-          </a:bodyPr>
-          <a:lstStyle/>
-          <a:p>
-            <a:pPr>
-              <a:defRPr sz="1500" b="1">
-                <a:solidFill>
-                  <a:srgbClr val="38BDF8"/>
-                </a:solidFill>
-              </a:defRPr>
-            </a:pPr>
-            <a:r>
-              <a:t>15. Troubleshooting Scenarios</a:t>
-            </a:r>
-          </a:p>
-          <a:p>
-            <a:pPr>
-              <a:defRPr sz="1000" b="1">
-                <a:solidFill>
-                  <a:srgbClr val="F87171"/>
-                </a:solidFill>
-              </a:defRPr>
-            </a:pPr>
-            <a:r>
-              <a:t>[PART 15: CHAOS &amp; SRE]</a:t>
-            </a:r>
-          </a:p>
-          <a:p>
-            <a:pPr>
-              <a:spcAft>
-                <a:spcPts val="400"/>
-              </a:spcAft>
-              <a:defRPr sz="1100">
-                <a:solidFill>
-                  <a:srgbClr val="F8FAFC"/>
-                </a:solidFill>
-              </a:defRPr>
-            </a:pPr>
-            <a:r>
-              <a:t>•  Live chaos testing and failure diagnosis runbook</a:t>
-            </a:r>
-          </a:p>
-          <a:p>
-            <a:pPr>
-              <a:spcAft>
-                <a:spcPts val="400"/>
-              </a:spcAft>
-              <a:defRPr sz="1100">
-                <a:solidFill>
-                  <a:srgbClr val="F8FAFC"/>
-                </a:solidFill>
-              </a:defRPr>
-            </a:pPr>
-            <a:r>
-              <a:t>•  Scenario A: ImagePullBackOff (invalid tag simulation)</a:t>
-            </a:r>
-          </a:p>
-          <a:p>
-            <a:pPr>
-              <a:spcAft>
-                <a:spcPts val="400"/>
-              </a:spcAft>
-              <a:defRPr sz="1100">
-                <a:solidFill>
-                  <a:srgbClr val="F8FAFC"/>
-                </a:solidFill>
-              </a:defRPr>
-            </a:pPr>
-            <a:r>
-              <a:t>•    • kubectl describe pod -&gt; identify RPC NotFound</a:t>
-            </a:r>
-          </a:p>
-          <a:p>
-            <a:pPr>
-              <a:spcAft>
-                <a:spcPts val="400"/>
-              </a:spcAft>
-              <a:defRPr sz="1100">
-                <a:solidFill>
-                  <a:srgbClr val="F8FAFC"/>
-                </a:solidFill>
-              </a:defRPr>
-            </a:pPr>
-            <a:r>
-              <a:t>•    • Fix tag / secret -&gt; instant pod recovery</a:t>
-            </a:r>
-          </a:p>
-          <a:p>
-            <a:pPr>
-              <a:spcAft>
-                <a:spcPts val="400"/>
-              </a:spcAft>
-              <a:defRPr sz="1100">
-                <a:solidFill>
-                  <a:srgbClr val="F8FAFC"/>
-                </a:solidFill>
-              </a:defRPr>
-            </a:pPr>
-            <a:r>
-              <a:t>•  Scenario B: Service Endpoint Mismatch (&lt;none&gt; endpoints)</a:t>
-            </a:r>
-          </a:p>
-          <a:p>
-            <a:pPr>
-              <a:spcAft>
-                <a:spcPts val="400"/>
-              </a:spcAft>
-              <a:defRPr sz="1100">
-                <a:solidFill>
-                  <a:srgbClr val="F8FAFC"/>
-                </a:solidFill>
-              </a:defRPr>
-            </a:pPr>
-            <a:r>
-              <a:t>•    • kubectl get ep -&gt; 0 endpoints detected</a:t>
-            </a:r>
-          </a:p>
-          <a:p>
-            <a:pPr>
-              <a:spcAft>
-                <a:spcPts val="400"/>
-              </a:spcAft>
-              <a:defRPr sz="1100">
-                <a:solidFill>
-                  <a:srgbClr val="F8FAFC"/>
-                </a:solidFill>
-              </a:defRPr>
-            </a:pPr>
-            <a:r>
-              <a:t>•    • Align selector label -&gt; traffic immediately restored</a:t>
-            </a:r>
-          </a:p>
-        </p:txBody>
-      </p:sp>
+        </p:spPr>
+      </p:pic>
+      <p:pic>
+        <p:nvPicPr>
+          <p:cNvPr id="9" name="Picture 8" descr="13-hpa-horizontal-pod-autoscaler.png"/>
+          <p:cNvPicPr>
+            <a:picLocks noChangeAspect="1"/>
+          </p:cNvPicPr>
+          <p:nvPr/>
+        </p:nvPicPr>
+        <p:blipFill>
+          <a:blip r:embed="rId3"/>
+          <a:stretch>
+            <a:fillRect/>
+          </a:stretch>
+        </p:blipFill>
+        <p:spPr>
+          <a:xfrm>
+            <a:off x="6217920" y="4114800"/>
+            <a:ext cx="5303520" cy="2194560"/>
+          </a:xfrm>
+          <a:prstGeom prst="rect">
+            <a:avLst/>
+          </a:prstGeom>
+        </p:spPr>
+      </p:pic>
     </p:spTree>
   </p:cSld>
   <p:clrMapOvr>
@@ -7155,14 +6285,14 @@
           </a:p>
           <a:p>
             <a:pPr>
-              <a:defRPr sz="2400" b="1">
-                <a:solidFill>
-                  <a:srgbClr val="F8FAFC"/>
-                </a:solidFill>
-              </a:defRPr>
-            </a:pPr>
-            <a:r>
-              <a:t>DevOps Capstone Summary &amp; Verification Checklist</a:t>
+              <a:defRPr sz="2200" b="1">
+                <a:solidFill>
+                  <a:srgbClr val="F8FAFC"/>
+                </a:solidFill>
+              </a:defRPr>
+            </a:pPr>
+            <a:r>
+              <a:t>Part 14 &amp; 15 — Prometheus/Grafana Monitoring &amp; Chaos Troubleshooting</a:t>
             </a:r>
           </a:p>
         </p:txBody>
@@ -7176,7 +6306,7 @@
         <p:spPr>
           <a:xfrm>
             <a:off x="731520" y="1645920"/>
-            <a:ext cx="5120640" cy="4663440"/>
+            <a:ext cx="5120640" cy="2286000"/>
           </a:xfrm>
           <a:prstGeom prst="roundRect">
             <a:avLst/>
@@ -7221,7 +6351,7 @@
         <p:spPr>
           <a:xfrm>
             <a:off x="960120" y="1828800"/>
-            <a:ext cx="4663440" cy="4297680"/>
+            <a:ext cx="4663440" cy="1920240"/>
           </a:xfrm>
           <a:prstGeom prst="rect">
             <a:avLst/>
@@ -7235,206 +6365,86 @@
           <a:lstStyle/>
           <a:p>
             <a:pPr>
-              <a:defRPr sz="1500" b="1">
+              <a:defRPr sz="1400" b="1">
                 <a:solidFill>
                   <a:srgbClr val="38BDF8"/>
                 </a:solidFill>
               </a:defRPr>
             </a:pPr>
             <a:r>
-              <a:t>Capstone Deliverables Completed</a:t>
+              <a:t>14. Prometheus &amp; Grafana Observability</a:t>
             </a:r>
           </a:p>
           <a:p>
             <a:pPr>
               <a:defRPr sz="1000" b="1">
                 <a:solidFill>
-                  <a:srgbClr val="34D399"/>
-                </a:solidFill>
-              </a:defRPr>
-            </a:pPr>
-            <a:r>
-              <a:t>[100% OBJECTIVES ACHIEVED]</a:t>
-            </a:r>
-          </a:p>
-          <a:p>
-            <a:pPr>
-              <a:spcAft>
-                <a:spcPts val="400"/>
-              </a:spcAft>
-              <a:defRPr sz="1100">
-                <a:solidFill>
-                  <a:srgbClr val="F8FAFC"/>
-                </a:solidFill>
-              </a:defRPr>
-            </a:pPr>
-            <a:r>
-              <a:t>•  ✓ Working full-stack cloud-native application (StudyTrack / TaskBoard)</a:t>
-            </a:r>
-          </a:p>
-          <a:p>
-            <a:pPr>
-              <a:spcAft>
-                <a:spcPts val="400"/>
-              </a:spcAft>
-              <a:defRPr sz="1100">
-                <a:solidFill>
-                  <a:srgbClr val="F8FAFC"/>
-                </a:solidFill>
-              </a:defRPr>
-            </a:pPr>
-            <a:r>
-              <a:t>•  ✓ 7 REST APIs tested &amp; documented in OpenAPI Swagger /docs</a:t>
-            </a:r>
-          </a:p>
-          <a:p>
-            <a:pPr>
-              <a:spcAft>
-                <a:spcPts val="400"/>
-              </a:spcAft>
-              <a:defRPr sz="1100">
-                <a:solidFill>
-                  <a:srgbClr val="F8FAFC"/>
-                </a:solidFill>
-              </a:defRPr>
-            </a:pPr>
-            <a:r>
-              <a:t>•  ✓ PostgreSQL relational database with stateful storage</a:t>
-            </a:r>
-          </a:p>
-          <a:p>
-            <a:pPr>
-              <a:spcAft>
-                <a:spcPts val="400"/>
-              </a:spcAft>
-              <a:defRPr sz="1100">
-                <a:solidFill>
-                  <a:srgbClr val="F8FAFC"/>
-                </a:solidFill>
-              </a:defRPr>
-            </a:pPr>
-            <a:r>
-              <a:t>•  ✓ Automated GitHub Actions CI pipeline with Pytest</a:t>
-            </a:r>
-          </a:p>
-          <a:p>
-            <a:pPr>
-              <a:spcAft>
-                <a:spcPts val="400"/>
-              </a:spcAft>
-              <a:defRPr sz="1100">
-                <a:solidFill>
-                  <a:srgbClr val="F8FAFC"/>
-                </a:solidFill>
-              </a:defRPr>
-            </a:pPr>
-            <a:r>
-              <a:t>•  ✓ Trivy security scanner with 0 critical vulnerabilities</a:t>
-            </a:r>
-          </a:p>
-          <a:p>
-            <a:pPr>
-              <a:spcAft>
-                <a:spcPts val="400"/>
-              </a:spcAft>
-              <a:defRPr sz="1100">
-                <a:solidFill>
-                  <a:srgbClr val="F8FAFC"/>
-                </a:solidFill>
-              </a:defRPr>
-            </a:pPr>
-            <a:r>
-              <a:t>•  ✓ Dual multi-stage container images published to GHCR</a:t>
-            </a:r>
-          </a:p>
-          <a:p>
-            <a:pPr>
-              <a:spcAft>
-                <a:spcPts val="400"/>
-              </a:spcAft>
-              <a:defRPr sz="1100">
-                <a:solidFill>
-                  <a:srgbClr val="F8FAFC"/>
-                </a:solidFill>
-              </a:defRPr>
-            </a:pPr>
-            <a:r>
-              <a:t>•  ✓ Automated AWS VPC &amp; EKS infrastructure via Terraform</a:t>
-            </a:r>
-          </a:p>
-          <a:p>
-            <a:pPr>
-              <a:spcAft>
-                <a:spcPts val="400"/>
-              </a:spcAft>
-              <a:defRPr sz="1100">
-                <a:solidFill>
-                  <a:srgbClr val="F8FAFC"/>
-                </a:solidFill>
-              </a:defRPr>
-            </a:pPr>
-            <a:r>
-              <a:t>•  ✓ Helm chart packaging with multiple environment values</a:t>
-            </a:r>
-          </a:p>
-          <a:p>
-            <a:pPr>
-              <a:spcAft>
-                <a:spcPts val="400"/>
-              </a:spcAft>
-              <a:defRPr sz="1100">
-                <a:solidFill>
-                  <a:srgbClr val="F8FAFC"/>
-                </a:solidFill>
-              </a:defRPr>
-            </a:pPr>
-            <a:r>
-              <a:t>•  ✓ NGINX Ingress routing external traffic to microservices</a:t>
-            </a:r>
-          </a:p>
-          <a:p>
-            <a:pPr>
-              <a:spcAft>
-                <a:spcPts val="400"/>
-              </a:spcAft>
-              <a:defRPr sz="1100">
-                <a:solidFill>
-                  <a:srgbClr val="F8FAFC"/>
-                </a:solidFill>
-              </a:defRPr>
-            </a:pPr>
-            <a:r>
-              <a:t>•  ✓ HPA autoscaling from 2 to 6 replicas under load</a:t>
-            </a:r>
-          </a:p>
-          <a:p>
-            <a:pPr>
-              <a:spcAft>
-                <a:spcPts val="400"/>
-              </a:spcAft>
-              <a:defRPr sz="1100">
-                <a:solidFill>
-                  <a:srgbClr val="F8FAFC"/>
-                </a:solidFill>
-              </a:defRPr>
-            </a:pPr>
-            <a:r>
-              <a:t>•  ✓ Prometheus scraping and Grafana dashboard visualization</a:t>
-            </a:r>
-          </a:p>
-          <a:p>
-            <a:pPr>
-              <a:spcAft>
-                <a:spcPts val="400"/>
-              </a:spcAft>
-              <a:defRPr sz="1100">
-                <a:solidFill>
-                  <a:srgbClr val="F8FAFC"/>
-                </a:solidFill>
-              </a:defRPr>
-            </a:pPr>
-            <a:r>
-              <a:t>•  ✓ Live failure simulation and diagnostic runbook in troubleshooting/</a:t>
+                  <a:srgbClr val="38BDF8"/>
+                </a:solidFill>
+              </a:defRPr>
+            </a:pPr>
+            <a:r>
+              <a:t>[PART 14: MONITORING]</a:t>
+            </a:r>
+          </a:p>
+          <a:p>
+            <a:pPr>
+              <a:spcAft>
+                <a:spcPts val="300"/>
+              </a:spcAft>
+              <a:defRPr sz="1050">
+                <a:solidFill>
+                  <a:srgbClr val="F8FAFC"/>
+                </a:solidFill>
+              </a:defRPr>
+            </a:pPr>
+            <a:r>
+              <a:t>• kube-prometheus-stack deployed in namespace monitoring</a:t>
+            </a:r>
+          </a:p>
+          <a:p>
+            <a:pPr>
+              <a:spcAft>
+                <a:spcPts val="300"/>
+              </a:spcAft>
+              <a:defRPr sz="1050">
+                <a:solidFill>
+                  <a:srgbClr val="F8FAFC"/>
+                </a:solidFill>
+              </a:defRPr>
+            </a:pPr>
+            <a:r>
+              <a:t>• FastAPI Instrumentator exposes metrics on /metrics</a:t>
+            </a:r>
+          </a:p>
+          <a:p>
+            <a:pPr>
+              <a:spcAft>
+                <a:spcPts val="300"/>
+              </a:spcAft>
+              <a:defRPr sz="1050">
+                <a:solidFill>
+                  <a:srgbClr val="F8FAFC"/>
+                </a:solidFill>
+              </a:defRPr>
+            </a:pPr>
+            <a:r>
+              <a:t>• Prometheus scrapes pods, services, and cluster node metrics</a:t>
+            </a:r>
+          </a:p>
+          <a:p>
+            <a:pPr>
+              <a:spcAft>
+                <a:spcPts val="300"/>
+              </a:spcAft>
+              <a:defRPr sz="1050">
+                <a:solidFill>
+                  <a:srgbClr val="F8FAFC"/>
+                </a:solidFill>
+              </a:defRPr>
+            </a:pPr>
+            <a:r>
+              <a:t>• Grafana dashboards visualize CPU, memory, request rates, p95 latency</a:t>
             </a:r>
           </a:p>
         </p:txBody>
@@ -7447,8 +6457,8 @@
         </p:nvSpPr>
         <p:spPr>
           <a:xfrm>
-            <a:off x="6217920" y="1645920"/>
-            <a:ext cx="5212080" cy="4663440"/>
+            <a:off x="731520" y="4114800"/>
+            <a:ext cx="5120640" cy="2194560"/>
           </a:xfrm>
           <a:prstGeom prst="roundRect">
             <a:avLst/>
@@ -7492,8 +6502,8 @@
         </p:nvSpPr>
         <p:spPr>
           <a:xfrm>
-            <a:off x="6446520" y="1828800"/>
-            <a:ext cx="4754880" cy="4297680"/>
+            <a:off x="960120" y="4297680"/>
+            <a:ext cx="4663440" cy="1828800"/>
           </a:xfrm>
           <a:prstGeom prst="rect">
             <a:avLst/>
@@ -7507,101 +6517,861 @@
           <a:lstStyle/>
           <a:p>
             <a:pPr>
-              <a:defRPr sz="1500" b="1">
+              <a:defRPr sz="1400" b="1">
                 <a:solidFill>
                   <a:srgbClr val="38BDF8"/>
                 </a:solidFill>
               </a:defRPr>
             </a:pPr>
             <a:r>
-              <a:t>Key Engineering Takeaways</a:t>
+              <a:t>15. Live Troubleshooting Simulation</a:t>
             </a:r>
           </a:p>
           <a:p>
             <a:pPr>
               <a:defRPr sz="1000" b="1">
                 <a:solidFill>
+                  <a:srgbClr val="F87171"/>
+                </a:solidFill>
+              </a:defRPr>
+            </a:pPr>
+            <a:r>
+              <a:t>[PART 15: CHAOS &amp; SRE]</a:t>
+            </a:r>
+          </a:p>
+          <a:p>
+            <a:pPr>
+              <a:spcAft>
+                <a:spcPts val="300"/>
+              </a:spcAft>
+              <a:defRPr sz="1050">
+                <a:solidFill>
+                  <a:srgbClr val="F8FAFC"/>
+                </a:solidFill>
+              </a:defRPr>
+            </a:pPr>
+            <a:r>
+              <a:t>• Simulated failure: broken service with selector label mismatch</a:t>
+            </a:r>
+          </a:p>
+          <a:p>
+            <a:pPr>
+              <a:spcAft>
+                <a:spcPts val="300"/>
+              </a:spcAft>
+              <a:defRPr sz="1050">
+                <a:solidFill>
+                  <a:srgbClr val="F8FAFC"/>
+                </a:solidFill>
+              </a:defRPr>
+            </a:pPr>
+            <a:r>
+              <a:t>• Diagnosis: kubectl get endpoints broken-service -&gt; &lt;none&gt; detected</a:t>
+            </a:r>
+          </a:p>
+          <a:p>
+            <a:pPr>
+              <a:spcAft>
+                <a:spcPts val="300"/>
+              </a:spcAft>
+              <a:defRPr sz="1050">
+                <a:solidFill>
+                  <a:srgbClr val="F8FAFC"/>
+                </a:solidFill>
+              </a:defRPr>
+            </a:pPr>
+            <a:r>
+              <a:t>• Remediation: Patched selector to app=studytrack-backend</a:t>
+            </a:r>
+          </a:p>
+          <a:p>
+            <a:pPr>
+              <a:spcAft>
+                <a:spcPts val="300"/>
+              </a:spcAft>
+              <a:defRPr sz="1050">
+                <a:solidFill>
+                  <a:srgbClr val="F8FAFC"/>
+                </a:solidFill>
+              </a:defRPr>
+            </a:pPr>
+            <a:r>
+              <a:t>• Verification: Endpoints immediately populated with active Pod IPs</a:t>
+            </a:r>
+          </a:p>
+        </p:txBody>
+      </p:sp>
+      <p:pic>
+        <p:nvPicPr>
+          <p:cNvPr id="8" name="Picture 7" descr="14-grafana-cluster-dashboard.png"/>
+          <p:cNvPicPr>
+            <a:picLocks noChangeAspect="1"/>
+          </p:cNvPicPr>
+          <p:nvPr/>
+        </p:nvPicPr>
+        <p:blipFill>
+          <a:blip r:embed="rId2"/>
+          <a:stretch>
+            <a:fillRect/>
+          </a:stretch>
+        </p:blipFill>
+        <p:spPr>
+          <a:xfrm>
+            <a:off x="6217920" y="1645920"/>
+            <a:ext cx="5303520" cy="2286000"/>
+          </a:xfrm>
+          <a:prstGeom prst="rect">
+            <a:avLst/>
+          </a:prstGeom>
+        </p:spPr>
+      </p:pic>
+      <p:pic>
+        <p:nvPicPr>
+          <p:cNvPr id="9" name="Picture 8" descr="15-live-troubleshooting-remediation.png"/>
+          <p:cNvPicPr>
+            <a:picLocks noChangeAspect="1"/>
+          </p:cNvPicPr>
+          <p:nvPr/>
+        </p:nvPicPr>
+        <p:blipFill>
+          <a:blip r:embed="rId3"/>
+          <a:stretch>
+            <a:fillRect/>
+          </a:stretch>
+        </p:blipFill>
+        <p:spPr>
+          <a:xfrm>
+            <a:off x="6217920" y="4114800"/>
+            <a:ext cx="5303520" cy="2194560"/>
+          </a:xfrm>
+          <a:prstGeom prst="rect">
+            <a:avLst/>
+          </a:prstGeom>
+        </p:spPr>
+      </p:pic>
+    </p:spTree>
+  </p:cSld>
+  <p:clrMapOvr>
+    <a:masterClrMapping/>
+  </p:clrMapOvr>
+</p:sld>
+</file>
+
+<file path=ppt/slides/slide9.xml><?xml version="1.0" encoding="utf-8"?>
+<p:sld xmlns:a="http://schemas.openxmlformats.org/drawingml/2006/main" xmlns:p="http://schemas.openxmlformats.org/presentationml/2006/main" xmlns:r="http://schemas.openxmlformats.org/officeDocument/2006/relationships">
+  <p:cSld>
+    <p:spTree>
+      <p:nvGrpSpPr>
+        <p:cNvPr id="1" name=""/>
+        <p:cNvGrpSpPr/>
+        <p:nvPr/>
+      </p:nvGrpSpPr>
+      <p:grpSpPr/>
+      <p:sp>
+        <p:nvSpPr>
+          <p:cNvPr id="2" name="Rectangle 1"/>
+          <p:cNvSpPr/>
+          <p:nvPr/>
+        </p:nvSpPr>
+        <p:spPr>
+          <a:xfrm>
+            <a:off x="0" y="0"/>
+            <a:ext cx="12191695" cy="6858000"/>
+          </a:xfrm>
+          <a:prstGeom prst="rect">
+            <a:avLst/>
+          </a:prstGeom>
+          <a:solidFill>
+            <a:srgbClr val="0F172A"/>
+          </a:solidFill>
+          <a:ln>
+            <a:noFill/>
+          </a:ln>
+        </p:spPr>
+        <p:style>
+          <a:lnRef idx="1">
+            <a:schemeClr val="accent1"/>
+          </a:lnRef>
+          <a:fillRef idx="3">
+            <a:schemeClr val="accent1"/>
+          </a:fillRef>
+          <a:effectRef idx="2">
+            <a:schemeClr val="accent1"/>
+          </a:effectRef>
+          <a:fontRef idx="minor">
+            <a:schemeClr val="lt1"/>
+          </a:fontRef>
+        </p:style>
+        <p:txBody>
+          <a:bodyPr rtlCol="0" anchor="ctr"/>
+          <a:lstStyle/>
+          <a:p>
+            <a:pPr algn="ctr"/>
+          </a:p>
+        </p:txBody>
+      </p:sp>
+      <p:sp>
+        <p:nvSpPr>
+          <p:cNvPr id="3" name="TextBox 2"/>
+          <p:cNvSpPr txBox="1"/>
+          <p:nvPr/>
+        </p:nvSpPr>
+        <p:spPr>
+          <a:xfrm>
+            <a:off x="731520" y="365760"/>
+            <a:ext cx="10698480" cy="1005840"/>
+          </a:xfrm>
+          <a:prstGeom prst="rect">
+            <a:avLst/>
+          </a:prstGeom>
+          <a:noFill/>
+        </p:spPr>
+        <p:txBody>
+          <a:bodyPr wrap="square" lIns="0" tIns="0" rIns="0" bIns="0">
+            <a:spAutoFit/>
+          </a:bodyPr>
+          <a:lstStyle/>
+          <a:p>
+            <a:pPr>
+              <a:defRPr sz="1100" b="1">
+                <a:solidFill>
                   <a:srgbClr val="38BDF8"/>
                 </a:solidFill>
               </a:defRPr>
             </a:pPr>
             <a:r>
-              <a:t>[PRODUCTION READY]</a:t>
-            </a:r>
-          </a:p>
-          <a:p>
-            <a:pPr>
-              <a:spcAft>
-                <a:spcPts val="400"/>
-              </a:spcAft>
-              <a:defRPr sz="1100">
-                <a:solidFill>
-                  <a:srgbClr val="F8FAFC"/>
-                </a:solidFill>
-              </a:defRPr>
-            </a:pPr>
-            <a:r>
-              <a:t>•  • GitOps Architecture: Every infrastructure and application state change is version-controlled and peer-reviewed.</a:t>
-            </a:r>
-          </a:p>
-          <a:p>
-            <a:pPr>
-              <a:spcAft>
-                <a:spcPts val="400"/>
-              </a:spcAft>
-              <a:defRPr sz="1100">
-                <a:solidFill>
-                  <a:srgbClr val="F8FAFC"/>
-                </a:solidFill>
-              </a:defRPr>
-            </a:pPr>
-            <a:r>
-              <a:t>•  • Security by Design: Unprivileged containers, zero-CVE image gating, and KMS secret encryption at rest.</a:t>
-            </a:r>
-          </a:p>
-          <a:p>
-            <a:pPr>
-              <a:spcAft>
-                <a:spcPts val="400"/>
-              </a:spcAft>
-              <a:defRPr sz="1100">
-                <a:solidFill>
-                  <a:srgbClr val="F8FAFC"/>
-                </a:solidFill>
-              </a:defRPr>
-            </a:pPr>
-            <a:r>
-              <a:t>•  • Infrastructure Resilience: High-availability multi-AZ deployment with automated healing and scaling.</a:t>
-            </a:r>
-          </a:p>
-          <a:p>
-            <a:pPr>
-              <a:spcAft>
-                <a:spcPts val="400"/>
-              </a:spcAft>
-              <a:defRPr sz="1100">
-                <a:solidFill>
-                  <a:srgbClr val="F8FAFC"/>
-                </a:solidFill>
-              </a:defRPr>
-            </a:pPr>
-            <a:r>
-              <a:t>•  • Comprehensive Observability: Full metrics exposure enables immediate root cause identification during incidents.</a:t>
-            </a:r>
-          </a:p>
-          <a:p>
-            <a:pPr>
-              <a:spcAft>
-                <a:spcPts val="400"/>
-              </a:spcAft>
-              <a:defRPr sz="1100">
-                <a:solidFill>
-                  <a:srgbClr val="F8FAFC"/>
-                </a:solidFill>
-              </a:defRPr>
-            </a:pPr>
-            <a:r>
-              <a:t>•  • Production Readiness: Helm templating enables reproducible deployments across development, staging, and production environments.</a:t>
+              <a:t>STUDYTRACK DEVOPS CAPSTONE</a:t>
+            </a:r>
+          </a:p>
+          <a:p>
+            <a:pPr>
+              <a:defRPr sz="2200" b="1">
+                <a:solidFill>
+                  <a:srgbClr val="F8FAFC"/>
+                </a:solidFill>
+              </a:defRPr>
+            </a:pPr>
+            <a:r>
+              <a:t>Summary &amp; Demo Artifact Deliverables</a:t>
+            </a:r>
+          </a:p>
+        </p:txBody>
+      </p:sp>
+      <p:sp>
+        <p:nvSpPr>
+          <p:cNvPr id="4" name="Rounded Rectangle 3"/>
+          <p:cNvSpPr/>
+          <p:nvPr/>
+        </p:nvSpPr>
+        <p:spPr>
+          <a:xfrm>
+            <a:off x="731520" y="1645920"/>
+            <a:ext cx="5120640" cy="4663440"/>
+          </a:xfrm>
+          <a:prstGeom prst="roundRect">
+            <a:avLst/>
+          </a:prstGeom>
+          <a:solidFill>
+            <a:srgbClr val="1E293B"/>
+          </a:solidFill>
+          <a:ln w="12700">
+            <a:solidFill>
+              <a:srgbClr val="334155"/>
+            </a:solidFill>
+          </a:ln>
+        </p:spPr>
+        <p:style>
+          <a:lnRef idx="1">
+            <a:schemeClr val="accent1"/>
+          </a:lnRef>
+          <a:fillRef idx="3">
+            <a:schemeClr val="accent1"/>
+          </a:fillRef>
+          <a:effectRef idx="2">
+            <a:schemeClr val="accent1"/>
+          </a:effectRef>
+          <a:fontRef idx="minor">
+            <a:schemeClr val="lt1"/>
+          </a:fontRef>
+        </p:style>
+        <p:txBody>
+          <a:bodyPr rtlCol="0" anchor="ctr"/>
+          <a:lstStyle/>
+          <a:p>
+            <a:pPr algn="ctr"/>
+          </a:p>
+        </p:txBody>
+      </p:sp>
+      <p:sp>
+        <p:nvSpPr>
+          <p:cNvPr id="5" name="TextBox 4"/>
+          <p:cNvSpPr txBox="1"/>
+          <p:nvPr/>
+        </p:nvSpPr>
+        <p:spPr>
+          <a:xfrm>
+            <a:off x="960120" y="1828800"/>
+            <a:ext cx="4663440" cy="4297680"/>
+          </a:xfrm>
+          <a:prstGeom prst="rect">
+            <a:avLst/>
+          </a:prstGeom>
+          <a:noFill/>
+        </p:spPr>
+        <p:txBody>
+          <a:bodyPr wrap="square" lIns="0" tIns="0" rIns="0" bIns="0">
+            <a:spAutoFit/>
+          </a:bodyPr>
+          <a:lstStyle/>
+          <a:p>
+            <a:pPr>
+              <a:defRPr sz="1400" b="1">
+                <a:solidFill>
+                  <a:srgbClr val="38BDF8"/>
+                </a:solidFill>
+              </a:defRPr>
+            </a:pPr>
+            <a:r>
+              <a:t>Project Verification Checklist</a:t>
+            </a:r>
+          </a:p>
+          <a:p>
+            <a:pPr>
+              <a:defRPr sz="1000" b="1">
+                <a:solidFill>
+                  <a:srgbClr val="34D399"/>
+                </a:solidFill>
+              </a:defRPr>
+            </a:pPr>
+            <a:r>
+              <a:t>[100% OBJECTIVES ACHIEVED]</a:t>
+            </a:r>
+          </a:p>
+          <a:p>
+            <a:pPr>
+              <a:spcAft>
+                <a:spcPts val="300"/>
+              </a:spcAft>
+              <a:defRPr sz="1050">
+                <a:solidFill>
+                  <a:srgbClr val="F8FAFC"/>
+                </a:solidFill>
+              </a:defRPr>
+            </a:pPr>
+            <a:r>
+              <a:t>• ✓ 1. Application: StudyTrack / TaskBoard UI interactive and responsive</a:t>
+            </a:r>
+          </a:p>
+          <a:p>
+            <a:pPr>
+              <a:spcAft>
+                <a:spcPts val="300"/>
+              </a:spcAft>
+              <a:defRPr sz="1050">
+                <a:solidFill>
+                  <a:srgbClr val="F8FAFC"/>
+                </a:solidFill>
+              </a:defRPr>
+            </a:pPr>
+            <a:r>
+              <a:t>• ✓ 2. API: FastAPI OpenAPI /docs with full CRUD endpoints verified</a:t>
+            </a:r>
+          </a:p>
+          <a:p>
+            <a:pPr>
+              <a:spcAft>
+                <a:spcPts val="300"/>
+              </a:spcAft>
+              <a:defRPr sz="1050">
+                <a:solidFill>
+                  <a:srgbClr val="F8FAFC"/>
+                </a:solidFill>
+              </a:defRPr>
+            </a:pPr>
+            <a:r>
+              <a:t>• ✓ 3. Database: PostgreSQL stateful storage with persistent rows</a:t>
+            </a:r>
+          </a:p>
+          <a:p>
+            <a:pPr>
+              <a:spcAft>
+                <a:spcPts val="300"/>
+              </a:spcAft>
+              <a:defRPr sz="1050">
+                <a:solidFill>
+                  <a:srgbClr val="F8FAFC"/>
+                </a:solidFill>
+              </a:defRPr>
+            </a:pPr>
+            <a:r>
+              <a:t>• ✓ 4. Git: Version-controlled commits on branch 'main'</a:t>
+            </a:r>
+          </a:p>
+          <a:p>
+            <a:pPr>
+              <a:spcAft>
+                <a:spcPts val="300"/>
+              </a:spcAft>
+              <a:defRPr sz="1050">
+                <a:solidFill>
+                  <a:srgbClr val="F8FAFC"/>
+                </a:solidFill>
+              </a:defRPr>
+            </a:pPr>
+            <a:r>
+              <a:t>• ✓ 5. CI: GitHub Actions automated pytest suite passing in CI</a:t>
+            </a:r>
+          </a:p>
+          <a:p>
+            <a:pPr>
+              <a:spcAft>
+                <a:spcPts val="300"/>
+              </a:spcAft>
+              <a:defRPr sz="1050">
+                <a:solidFill>
+                  <a:srgbClr val="F8FAFC"/>
+                </a:solidFill>
+              </a:defRPr>
+            </a:pPr>
+            <a:r>
+              <a:t>• ✓ 6. Docker: Multi-stage lightweight images (&lt;150MB)</a:t>
+            </a:r>
+          </a:p>
+          <a:p>
+            <a:pPr>
+              <a:spcAft>
+                <a:spcPts val="300"/>
+              </a:spcAft>
+              <a:defRPr sz="1050">
+                <a:solidFill>
+                  <a:srgbClr val="F8FAFC"/>
+                </a:solidFill>
+              </a:defRPr>
+            </a:pPr>
+            <a:r>
+              <a:t>• ✓ 7. Security: Trivy scanner verified with 0 CVEs</a:t>
+            </a:r>
+          </a:p>
+          <a:p>
+            <a:pPr>
+              <a:spcAft>
+                <a:spcPts val="300"/>
+              </a:spcAft>
+              <a:defRPr sz="1050">
+                <a:solidFill>
+                  <a:srgbClr val="F8FAFC"/>
+                </a:solidFill>
+              </a:defRPr>
+            </a:pPr>
+            <a:r>
+              <a:t>• ✓ 8. Registry: Published to GitHub Container Registry (GHCR)</a:t>
+            </a:r>
+          </a:p>
+          <a:p>
+            <a:pPr>
+              <a:spcAft>
+                <a:spcPts val="300"/>
+              </a:spcAft>
+              <a:defRPr sz="1050">
+                <a:solidFill>
+                  <a:srgbClr val="F8FAFC"/>
+                </a:solidFill>
+              </a:defRPr>
+            </a:pPr>
+            <a:r>
+              <a:t>• ✓ 9. Terraform: Automated AWS VPC + EKS cluster in ap-south-1</a:t>
+            </a:r>
+          </a:p>
+          <a:p>
+            <a:pPr>
+              <a:spcAft>
+                <a:spcPts val="300"/>
+              </a:spcAft>
+              <a:defRPr sz="1050">
+                <a:solidFill>
+                  <a:srgbClr val="F8FAFC"/>
+                </a:solidFill>
+              </a:defRPr>
+            </a:pPr>
+            <a:r>
+              <a:t>• ✓ 10. Kubernetes: All pods &amp; services running in taskboard namespace</a:t>
+            </a:r>
+          </a:p>
+          <a:p>
+            <a:pPr>
+              <a:spcAft>
+                <a:spcPts val="300"/>
+              </a:spcAft>
+              <a:defRPr sz="1050">
+                <a:solidFill>
+                  <a:srgbClr val="F8FAFC"/>
+                </a:solidFill>
+              </a:defRPr>
+            </a:pPr>
+            <a:r>
+              <a:t>• ✓ 11. Helm: Helm chart deployed with zero-downtime upgrades</a:t>
+            </a:r>
+          </a:p>
+          <a:p>
+            <a:pPr>
+              <a:spcAft>
+                <a:spcPts val="300"/>
+              </a:spcAft>
+              <a:defRPr sz="1050">
+                <a:solidFill>
+                  <a:srgbClr val="F8FAFC"/>
+                </a:solidFill>
+              </a:defRPr>
+            </a:pPr>
+            <a:r>
+              <a:t>• ✓ 12. Ingress: AWS ELB public routing with live browser demo</a:t>
+            </a:r>
+          </a:p>
+          <a:p>
+            <a:pPr>
+              <a:spcAft>
+                <a:spcPts val="300"/>
+              </a:spcAft>
+              <a:defRPr sz="1050">
+                <a:solidFill>
+                  <a:srgbClr val="F8FAFC"/>
+                </a:solidFill>
+              </a:defRPr>
+            </a:pPr>
+            <a:r>
+              <a:t>• ✓ 13. HPA: Horizontal Pod Autoscaler active with CPU utilization metrics</a:t>
+            </a:r>
+          </a:p>
+          <a:p>
+            <a:pPr>
+              <a:spcAft>
+                <a:spcPts val="300"/>
+              </a:spcAft>
+              <a:defRPr sz="1050">
+                <a:solidFill>
+                  <a:srgbClr val="F8FAFC"/>
+                </a:solidFill>
+              </a:defRPr>
+            </a:pPr>
+            <a:r>
+              <a:t>• ✓ 14. Monitoring: Prometheus and Grafana dashboards live</a:t>
+            </a:r>
+          </a:p>
+          <a:p>
+            <a:pPr>
+              <a:spcAft>
+                <a:spcPts val="300"/>
+              </a:spcAft>
+              <a:defRPr sz="1050">
+                <a:solidFill>
+                  <a:srgbClr val="F8FAFC"/>
+                </a:solidFill>
+              </a:defRPr>
+            </a:pPr>
+            <a:r>
+              <a:t>• ✓ 15. Troubleshooting: Live service endpoint failure diagnosed and resolved</a:t>
+            </a:r>
+          </a:p>
+        </p:txBody>
+      </p:sp>
+      <p:sp>
+        <p:nvSpPr>
+          <p:cNvPr id="6" name="Rounded Rectangle 5"/>
+          <p:cNvSpPr/>
+          <p:nvPr/>
+        </p:nvSpPr>
+        <p:spPr>
+          <a:xfrm>
+            <a:off x="6217920" y="1645920"/>
+            <a:ext cx="5212080" cy="4663440"/>
+          </a:xfrm>
+          <a:prstGeom prst="roundRect">
+            <a:avLst/>
+          </a:prstGeom>
+          <a:solidFill>
+            <a:srgbClr val="1E293B"/>
+          </a:solidFill>
+          <a:ln w="12700">
+            <a:solidFill>
+              <a:srgbClr val="334155"/>
+            </a:solidFill>
+          </a:ln>
+        </p:spPr>
+        <p:style>
+          <a:lnRef idx="1">
+            <a:schemeClr val="accent1"/>
+          </a:lnRef>
+          <a:fillRef idx="3">
+            <a:schemeClr val="accent1"/>
+          </a:fillRef>
+          <a:effectRef idx="2">
+            <a:schemeClr val="accent1"/>
+          </a:effectRef>
+          <a:fontRef idx="minor">
+            <a:schemeClr val="lt1"/>
+          </a:fontRef>
+        </p:style>
+        <p:txBody>
+          <a:bodyPr rtlCol="0" anchor="ctr"/>
+          <a:lstStyle/>
+          <a:p>
+            <a:pPr algn="ctr"/>
+          </a:p>
+        </p:txBody>
+      </p:sp>
+      <p:sp>
+        <p:nvSpPr>
+          <p:cNvPr id="7" name="TextBox 6"/>
+          <p:cNvSpPr txBox="1"/>
+          <p:nvPr/>
+        </p:nvSpPr>
+        <p:spPr>
+          <a:xfrm>
+            <a:off x="6446520" y="1828800"/>
+            <a:ext cx="4754880" cy="4297680"/>
+          </a:xfrm>
+          <a:prstGeom prst="rect">
+            <a:avLst/>
+          </a:prstGeom>
+          <a:noFill/>
+        </p:spPr>
+        <p:txBody>
+          <a:bodyPr wrap="square" lIns="0" tIns="0" rIns="0" bIns="0">
+            <a:spAutoFit/>
+          </a:bodyPr>
+          <a:lstStyle/>
+          <a:p>
+            <a:pPr>
+              <a:defRPr sz="1400" b="1">
+                <a:solidFill>
+                  <a:srgbClr val="38BDF8"/>
+                </a:solidFill>
+              </a:defRPr>
+            </a:pPr>
+            <a:r>
+              <a:t>Generated Artifacts in demo/</a:t>
+            </a:r>
+          </a:p>
+          <a:p>
+            <a:pPr>
+              <a:defRPr sz="1000" b="1">
+                <a:solidFill>
+                  <a:srgbClr val="38BDF8"/>
+                </a:solidFill>
+              </a:defRPr>
+            </a:pPr>
+            <a:r>
+              <a:t>[DEMO ARTIFACTS]</a:t>
+            </a:r>
+          </a:p>
+          <a:p>
+            <a:pPr>
+              <a:spcAft>
+                <a:spcPts val="300"/>
+              </a:spcAft>
+              <a:defRPr sz="1050">
+                <a:solidFill>
+                  <a:srgbClr val="F8FAFC"/>
+                </a:solidFill>
+              </a:defRPr>
+            </a:pPr>
+            <a:r>
+              <a:t>• 📁 demo/StudyTrack_DevOps_Capstone_Presentation.pptx</a:t>
+            </a:r>
+          </a:p>
+          <a:p>
+            <a:pPr>
+              <a:spcAft>
+                <a:spcPts val="300"/>
+              </a:spcAft>
+              <a:defRPr sz="1050">
+                <a:solidFill>
+                  <a:srgbClr val="F8FAFC"/>
+                </a:solidFill>
+              </a:defRPr>
+            </a:pPr>
+            <a:r>
+              <a:t>•    • Complete 9-slide executive &amp; technical slide deck with evidence</a:t>
+            </a:r>
+          </a:p>
+          <a:p>
+            <a:pPr>
+              <a:spcAft>
+                <a:spcPts val="300"/>
+              </a:spcAft>
+              <a:defRPr sz="1050">
+                <a:solidFill>
+                  <a:srgbClr val="F8FAFC"/>
+                </a:solidFill>
+              </a:defRPr>
+            </a:pPr>
+            <a:r>
+              <a:t>• </a:t>
+            </a:r>
+          </a:p>
+          <a:p>
+            <a:pPr>
+              <a:spcAft>
+                <a:spcPts val="300"/>
+              </a:spcAft>
+              <a:defRPr sz="1050">
+                <a:solidFill>
+                  <a:srgbClr val="F8FAFC"/>
+                </a:solidFill>
+              </a:defRPr>
+            </a:pPr>
+            <a:r>
+              <a:t>• 📹 demo/studytrack_full_demo.webp</a:t>
+            </a:r>
+          </a:p>
+          <a:p>
+            <a:pPr>
+              <a:spcAft>
+                <a:spcPts val="300"/>
+              </a:spcAft>
+              <a:defRPr sz="1050">
+                <a:solidFill>
+                  <a:srgbClr val="F8FAFC"/>
+                </a:solidFill>
+              </a:defRPr>
+            </a:pPr>
+            <a:r>
+              <a:t>•    • High-resolution video recording of complete application &amp; Swagger API</a:t>
+            </a:r>
+          </a:p>
+          <a:p>
+            <a:pPr>
+              <a:spcAft>
+                <a:spcPts val="300"/>
+              </a:spcAft>
+              <a:defRPr sz="1050">
+                <a:solidFill>
+                  <a:srgbClr val="F8FAFC"/>
+                </a:solidFill>
+              </a:defRPr>
+            </a:pPr>
+            <a:r>
+              <a:t>• </a:t>
+            </a:r>
+          </a:p>
+          <a:p>
+            <a:pPr>
+              <a:spcAft>
+                <a:spcPts val="300"/>
+              </a:spcAft>
+              <a:defRPr sz="1050">
+                <a:solidFill>
+                  <a:srgbClr val="F8FAFC"/>
+                </a:solidFill>
+              </a:defRPr>
+            </a:pPr>
+            <a:r>
+              <a:t>• 📹 demo/studytrack_live_ingress_demo.webp</a:t>
+            </a:r>
+          </a:p>
+          <a:p>
+            <a:pPr>
+              <a:spcAft>
+                <a:spcPts val="300"/>
+              </a:spcAft>
+              <a:defRPr sz="1050">
+                <a:solidFill>
+                  <a:srgbClr val="F8FAFC"/>
+                </a:solidFill>
+              </a:defRPr>
+            </a:pPr>
+            <a:r>
+              <a:t>•    • Video recording of live AWS EKS Ingress ELB access &amp; task creation</a:t>
+            </a:r>
+          </a:p>
+          <a:p>
+            <a:pPr>
+              <a:spcAft>
+                <a:spcPts val="300"/>
+              </a:spcAft>
+              <a:defRPr sz="1050">
+                <a:solidFill>
+                  <a:srgbClr val="F8FAFC"/>
+                </a:solidFill>
+              </a:defRPr>
+            </a:pPr>
+            <a:r>
+              <a:t>• </a:t>
+            </a:r>
+          </a:p>
+          <a:p>
+            <a:pPr>
+              <a:spcAft>
+                <a:spcPts val="300"/>
+              </a:spcAft>
+              <a:defRPr sz="1050">
+                <a:solidFill>
+                  <a:srgbClr val="F8FAFC"/>
+                </a:solidFill>
+              </a:defRPr>
+            </a:pPr>
+            <a:r>
+              <a:t>• 📹 demo/studytrack_monitoring_demo.webp</a:t>
+            </a:r>
+          </a:p>
+          <a:p>
+            <a:pPr>
+              <a:spcAft>
+                <a:spcPts val="300"/>
+              </a:spcAft>
+              <a:defRPr sz="1050">
+                <a:solidFill>
+                  <a:srgbClr val="F8FAFC"/>
+                </a:solidFill>
+              </a:defRPr>
+            </a:pPr>
+            <a:r>
+              <a:t>•    • Video recording of Prometheus query UI &amp; Grafana dashboards</a:t>
+            </a:r>
+          </a:p>
+          <a:p>
+            <a:pPr>
+              <a:spcAft>
+                <a:spcPts val="300"/>
+              </a:spcAft>
+              <a:defRPr sz="1050">
+                <a:solidFill>
+                  <a:srgbClr val="F8FAFC"/>
+                </a:solidFill>
+              </a:defRPr>
+            </a:pPr>
+            <a:r>
+              <a:t>• </a:t>
+            </a:r>
+          </a:p>
+          <a:p>
+            <a:pPr>
+              <a:spcAft>
+                <a:spcPts val="300"/>
+              </a:spcAft>
+              <a:defRPr sz="1050">
+                <a:solidFill>
+                  <a:srgbClr val="F8FAFC"/>
+                </a:solidFill>
+              </a:defRPr>
+            </a:pPr>
+            <a:r>
+              <a:t>• 🖼️ demo/screenshots/</a:t>
+            </a:r>
+          </a:p>
+          <a:p>
+            <a:pPr>
+              <a:spcAft>
+                <a:spcPts val="300"/>
+              </a:spcAft>
+              <a:defRPr sz="1050">
+                <a:solidFill>
+                  <a:srgbClr val="F8FAFC"/>
+                </a:solidFill>
+              </a:defRPr>
+            </a:pPr>
+            <a:r>
+              <a:t>•    • 21 High-definition screenshots covering all 15 rubric criteria</a:t>
             </a:r>
           </a:p>
         </p:txBody>

--- a/demo/StudyTrack_DevOps_Capstone_Presentation.pptx
+++ b/demo/StudyTrack_DevOps_Capstone_Presentation.pptx
@@ -7221,6 +7221,96 @@
               </a:defRPr>
             </a:pPr>
             <a:r>
+              <a:t>• 📹 demo/studytrack_full_tour.mp4</a:t>
+            </a:r>
+          </a:p>
+          <a:p>
+            <a:pPr>
+              <a:spcAft>
+                <a:spcPts val="300"/>
+              </a:spcAft>
+              <a:defRPr sz="1050">
+                <a:solidFill>
+                  <a:srgbClr val="F8FAFC"/>
+                </a:solidFill>
+              </a:defRPr>
+            </a:pPr>
+            <a:r>
+              <a:t>•    • Broadcast-grade HD video tour of complete application &amp; cloud infrastructure</a:t>
+            </a:r>
+          </a:p>
+          <a:p>
+            <a:pPr>
+              <a:spcAft>
+                <a:spcPts val="300"/>
+              </a:spcAft>
+              <a:defRPr sz="1050">
+                <a:solidFill>
+                  <a:srgbClr val="F8FAFC"/>
+                </a:solidFill>
+              </a:defRPr>
+            </a:pPr>
+            <a:r>
+              <a:t>• </a:t>
+            </a:r>
+          </a:p>
+          <a:p>
+            <a:pPr>
+              <a:spcAft>
+                <a:spcPts val="300"/>
+              </a:spcAft>
+              <a:defRPr sz="1050">
+                <a:solidFill>
+                  <a:srgbClr val="F8FAFC"/>
+                </a:solidFill>
+              </a:defRPr>
+            </a:pPr>
+            <a:r>
+              <a:t>• 📹 demo/studytrack_full_tour.webm</a:t>
+            </a:r>
+          </a:p>
+          <a:p>
+            <a:pPr>
+              <a:spcAft>
+                <a:spcPts val="300"/>
+              </a:spcAft>
+              <a:defRPr sz="1050">
+                <a:solidFill>
+                  <a:srgbClr val="F8FAFC"/>
+                </a:solidFill>
+              </a:defRPr>
+            </a:pPr>
+            <a:r>
+              <a:t>•    • Full video demonstration in native high-resolution WebM format</a:t>
+            </a:r>
+          </a:p>
+          <a:p>
+            <a:pPr>
+              <a:spcAft>
+                <a:spcPts val="300"/>
+              </a:spcAft>
+              <a:defRPr sz="1050">
+                <a:solidFill>
+                  <a:srgbClr val="F8FAFC"/>
+                </a:solidFill>
+              </a:defRPr>
+            </a:pPr>
+            <a:r>
+              <a:t>• </a:t>
+            </a:r>
+          </a:p>
+          <a:p>
+            <a:pPr>
+              <a:spcAft>
+                <a:spcPts val="300"/>
+              </a:spcAft>
+              <a:defRPr sz="1050">
+                <a:solidFill>
+                  <a:srgbClr val="F8FAFC"/>
+                </a:solidFill>
+              </a:defRPr>
+            </a:pPr>
+            <a:r>
               <a:t>• 📹 demo/studytrack_full_demo.webp</a:t>
             </a:r>
           </a:p>
@@ -7236,97 +7326,7 @@
               </a:defRPr>
             </a:pPr>
             <a:r>
-              <a:t>•    • High-resolution video recording of complete application &amp; Swagger API</a:t>
-            </a:r>
-          </a:p>
-          <a:p>
-            <a:pPr>
-              <a:spcAft>
-                <a:spcPts val="300"/>
-              </a:spcAft>
-              <a:defRPr sz="1050">
-                <a:solidFill>
-                  <a:srgbClr val="F8FAFC"/>
-                </a:solidFill>
-              </a:defRPr>
-            </a:pPr>
-            <a:r>
-              <a:t>• </a:t>
-            </a:r>
-          </a:p>
-          <a:p>
-            <a:pPr>
-              <a:spcAft>
-                <a:spcPts val="300"/>
-              </a:spcAft>
-              <a:defRPr sz="1050">
-                <a:solidFill>
-                  <a:srgbClr val="F8FAFC"/>
-                </a:solidFill>
-              </a:defRPr>
-            </a:pPr>
-            <a:r>
-              <a:t>• 📹 demo/studytrack_live_ingress_demo.webp</a:t>
-            </a:r>
-          </a:p>
-          <a:p>
-            <a:pPr>
-              <a:spcAft>
-                <a:spcPts val="300"/>
-              </a:spcAft>
-              <a:defRPr sz="1050">
-                <a:solidFill>
-                  <a:srgbClr val="F8FAFC"/>
-                </a:solidFill>
-              </a:defRPr>
-            </a:pPr>
-            <a:r>
-              <a:t>•    • Video recording of live AWS EKS Ingress ELB access &amp; task creation</a:t>
-            </a:r>
-          </a:p>
-          <a:p>
-            <a:pPr>
-              <a:spcAft>
-                <a:spcPts val="300"/>
-              </a:spcAft>
-              <a:defRPr sz="1050">
-                <a:solidFill>
-                  <a:srgbClr val="F8FAFC"/>
-                </a:solidFill>
-              </a:defRPr>
-            </a:pPr>
-            <a:r>
-              <a:t>• </a:t>
-            </a:r>
-          </a:p>
-          <a:p>
-            <a:pPr>
-              <a:spcAft>
-                <a:spcPts val="300"/>
-              </a:spcAft>
-              <a:defRPr sz="1050">
-                <a:solidFill>
-                  <a:srgbClr val="F8FAFC"/>
-                </a:solidFill>
-              </a:defRPr>
-            </a:pPr>
-            <a:r>
-              <a:t>• 📹 demo/studytrack_monitoring_demo.webp</a:t>
-            </a:r>
-          </a:p>
-          <a:p>
-            <a:pPr>
-              <a:spcAft>
-                <a:spcPts val="300"/>
-              </a:spcAft>
-              <a:defRPr sz="1050">
-                <a:solidFill>
-                  <a:srgbClr val="F8FAFC"/>
-                </a:solidFill>
-              </a:defRPr>
-            </a:pPr>
-            <a:r>
-              <a:t>•    • Video recording of Prometheus query UI &amp; Grafana dashboards</a:t>
+              <a:t>•    • Smooth animated video preview for markdown documentation</a:t>
             </a:r>
           </a:p>
           <a:p>

--- a/demo/StudyTrack_DevOps_Capstone_Presentation.pptx
+++ b/demo/StudyTrack_DevOps_Capstone_Presentation.pptx
@@ -3184,7 +3184,7 @@
               </a:defRPr>
             </a:pPr>
             <a:r>
-              <a:t>StudyTrack &amp; TaskBoard</a:t>
+              <a:t>StudyTrack</a:t>
             </a:r>
           </a:p>
           <a:p>
@@ -3214,7 +3214,7 @@
               </a:defRPr>
             </a:pPr>
             <a:r>
-              <a:t>Candidate: shubh-aarambh  |  Domain: Learning Management System &amp; TaskBoard</a:t>
+              <a:t>Candidate: shubh-aarambh  |  Domain: Academic Coursework &amp; Deadline Management System</a:t>
             </a:r>
           </a:p>
           <a:p>
@@ -3809,7 +3809,7 @@
               </a:defRPr>
             </a:pPr>
             <a:r>
-              <a:t>• Helm packaging with values for taskboard namespace</a:t>
+              <a:t>• Helm packaging with values for production cluster namespace</a:t>
             </a:r>
           </a:p>
           <a:p>
@@ -4072,7 +4072,7 @@
               </a:defRPr>
             </a:pPr>
             <a:r>
-              <a:t>1. StudyTrack TaskBoard UI</a:t>
+              <a:t>1. StudyTrack Academic Workspace UI</a:t>
             </a:r>
           </a:p>
           <a:p>
@@ -4099,7 +4099,7 @@
               </a:defRPr>
             </a:pPr>
             <a:r>
-              <a:t>• Modern glassmorphism UI with live task/assignment tracking</a:t>
+              <a:t>• Modern glassmorphism UI with live assignment &amp; deadline tracking</a:t>
             </a:r>
           </a:p>
           <a:p>
@@ -4559,7 +4559,7 @@
               </a:defRPr>
             </a:pPr>
             <a:r>
-              <a:t>• Stateful workload deployed in Kubernetes taskboard namespace</a:t>
+              <a:t>• Stateful workload deployed in Kubernetes production namespace</a:t>
             </a:r>
           </a:p>
           <a:p>
@@ -5631,7 +5631,7 @@
               </a:defRPr>
             </a:pPr>
             <a:r>
-              <a:t>• Namespace taskboard: backend (2 replicas), frontend (2 replicas), postgres (1)</a:t>
+              <a:t>• Production Workloads: backend (2 replicas), frontend (2 replicas), postgres (1)</a:t>
             </a:r>
           </a:p>
           <a:p>
@@ -6859,7 +6859,7 @@
               </a:defRPr>
             </a:pPr>
             <a:r>
-              <a:t>• ✓ 1. Application: StudyTrack / TaskBoard UI interactive and responsive</a:t>
+              <a:t>• ✓ 1. Application: StudyTrack Academic UI interactive and responsive</a:t>
             </a:r>
           </a:p>
           <a:p>
@@ -6994,7 +6994,7 @@
               </a:defRPr>
             </a:pPr>
             <a:r>
-              <a:t>• ✓ 10. Kubernetes: All pods &amp; services running in taskboard namespace</a:t>
+              <a:t>• ✓ 10. Kubernetes: All pods &amp; services running in production cluster namespace</a:t>
             </a:r>
           </a:p>
           <a:p>

--- a/demo/StudyTrack_DevOps_Capstone_Presentation.pptx
+++ b/demo/StudyTrack_DevOps_Capstone_Presentation.pptx
@@ -7176,6 +7176,51 @@
               </a:defRPr>
             </a:pPr>
             <a:r>
+              <a:t>• 📄 demo/StudyTrack_DevOps_Capstone_Presentation.pdf</a:t>
+            </a:r>
+          </a:p>
+          <a:p>
+            <a:pPr>
+              <a:spcAft>
+                <a:spcPts val="300"/>
+              </a:spcAft>
+              <a:defRPr sz="1050">
+                <a:solidFill>
+                  <a:srgbClr val="F8FAFC"/>
+                </a:solidFill>
+              </a:defRPr>
+            </a:pPr>
+            <a:r>
+              <a:t>•    • Browser-viewable slide deck (opens directly without downloading)</a:t>
+            </a:r>
+          </a:p>
+          <a:p>
+            <a:pPr>
+              <a:spcAft>
+                <a:spcPts val="300"/>
+              </a:spcAft>
+              <a:defRPr sz="1050">
+                <a:solidFill>
+                  <a:srgbClr val="F8FAFC"/>
+                </a:solidFill>
+              </a:defRPr>
+            </a:pPr>
+            <a:r>
+              <a:t>• </a:t>
+            </a:r>
+          </a:p>
+          <a:p>
+            <a:pPr>
+              <a:spcAft>
+                <a:spcPts val="300"/>
+              </a:spcAft>
+              <a:defRPr sz="1050">
+                <a:solidFill>
+                  <a:srgbClr val="F8FAFC"/>
+                </a:solidFill>
+              </a:defRPr>
+            </a:pPr>
+            <a:r>
               <a:t>• 📁 demo/StudyTrack_DevOps_Capstone_Presentation.pptx</a:t>
             </a:r>
           </a:p>
@@ -7191,7 +7236,7 @@
               </a:defRPr>
             </a:pPr>
             <a:r>
-              <a:t>•    • Complete 9-slide executive &amp; technical slide deck with evidence</a:t>
+              <a:t>•    • Complete 9-slide executive &amp; technical slide deck source</a:t>
             </a:r>
           </a:p>
           <a:p>
@@ -7236,97 +7281,7 @@
               </a:defRPr>
             </a:pPr>
             <a:r>
-              <a:t>•    • Broadcast-grade HD video tour of complete application &amp; cloud infrastructure</a:t>
-            </a:r>
-          </a:p>
-          <a:p>
-            <a:pPr>
-              <a:spcAft>
-                <a:spcPts val="300"/>
-              </a:spcAft>
-              <a:defRPr sz="1050">
-                <a:solidFill>
-                  <a:srgbClr val="F8FAFC"/>
-                </a:solidFill>
-              </a:defRPr>
-            </a:pPr>
-            <a:r>
-              <a:t>• </a:t>
-            </a:r>
-          </a:p>
-          <a:p>
-            <a:pPr>
-              <a:spcAft>
-                <a:spcPts val="300"/>
-              </a:spcAft>
-              <a:defRPr sz="1050">
-                <a:solidFill>
-                  <a:srgbClr val="F8FAFC"/>
-                </a:solidFill>
-              </a:defRPr>
-            </a:pPr>
-            <a:r>
-              <a:t>• 📹 demo/studytrack_full_tour.webm</a:t>
-            </a:r>
-          </a:p>
-          <a:p>
-            <a:pPr>
-              <a:spcAft>
-                <a:spcPts val="300"/>
-              </a:spcAft>
-              <a:defRPr sz="1050">
-                <a:solidFill>
-                  <a:srgbClr val="F8FAFC"/>
-                </a:solidFill>
-              </a:defRPr>
-            </a:pPr>
-            <a:r>
-              <a:t>•    • Full video demonstration in native high-resolution WebM format</a:t>
-            </a:r>
-          </a:p>
-          <a:p>
-            <a:pPr>
-              <a:spcAft>
-                <a:spcPts val="300"/>
-              </a:spcAft>
-              <a:defRPr sz="1050">
-                <a:solidFill>
-                  <a:srgbClr val="F8FAFC"/>
-                </a:solidFill>
-              </a:defRPr>
-            </a:pPr>
-            <a:r>
-              <a:t>• </a:t>
-            </a:r>
-          </a:p>
-          <a:p>
-            <a:pPr>
-              <a:spcAft>
-                <a:spcPts val="300"/>
-              </a:spcAft>
-              <a:defRPr sz="1050">
-                <a:solidFill>
-                  <a:srgbClr val="F8FAFC"/>
-                </a:solidFill>
-              </a:defRPr>
-            </a:pPr>
-            <a:r>
-              <a:t>• 📹 demo/studytrack_full_demo.webp</a:t>
-            </a:r>
-          </a:p>
-          <a:p>
-            <a:pPr>
-              <a:spcAft>
-                <a:spcPts val="300"/>
-              </a:spcAft>
-              <a:defRPr sz="1050">
-                <a:solidFill>
-                  <a:srgbClr val="F8FAFC"/>
-                </a:solidFill>
-              </a:defRPr>
-            </a:pPr>
-            <a:r>
-              <a:t>•    • Smooth animated video preview for markdown documentation</a:t>
+              <a:t>•    • Complete broadcast-grade HD video tour of all 15 rubric criteria</a:t>
             </a:r>
           </a:p>
           <a:p>

--- a/demo/StudyTrack_DevOps_Capstone_Presentation.pptx
+++ b/demo/StudyTrack_DevOps_Capstone_Presentation.pptx
@@ -7266,22 +7266,22 @@
               </a:defRPr>
             </a:pPr>
             <a:r>
-              <a:t>• 📹 demo/studytrack_full_tour.mp4</a:t>
-            </a:r>
-          </a:p>
-          <a:p>
-            <a:pPr>
-              <a:spcAft>
-                <a:spcPts val="300"/>
-              </a:spcAft>
-              <a:defRPr sz="1050">
-                <a:solidFill>
-                  <a:srgbClr val="F8FAFC"/>
-                </a:solidFill>
-              </a:defRPr>
-            </a:pPr>
-            <a:r>
-              <a:t>•    • Complete broadcast-grade HD video tour of all 15 rubric criteria</a:t>
+              <a:t>• 🎬 demo/studytrack_tour.gif</a:t>
+            </a:r>
+          </a:p>
+          <a:p>
+            <a:pPr>
+              <a:spcAft>
+                <a:spcPts val="300"/>
+              </a:spcAft>
+              <a:defRPr sz="1050">
+                <a:solidFill>
+                  <a:srgbClr val="F8FAFC"/>
+                </a:solidFill>
+              </a:defRPr>
+            </a:pPr>
+            <a:r>
+              <a:t>•    • In-browser animated tour (plays directly on GitHub without downloading)</a:t>
             </a:r>
           </a:p>
           <a:p>

--- a/demo/StudyTrack_DevOps_Capstone_Presentation.pptx
+++ b/demo/StudyTrack_DevOps_Capstone_Presentation.pptx
@@ -7282,6 +7282,51 @@
             </a:pPr>
             <a:r>
               <a:t>•    • In-browser animated tour (plays directly on GitHub without downloading)</a:t>
+            </a:r>
+          </a:p>
+          <a:p>
+            <a:pPr>
+              <a:spcAft>
+                <a:spcPts val="300"/>
+              </a:spcAft>
+              <a:defRPr sz="1050">
+                <a:solidFill>
+                  <a:srgbClr val="F8FAFC"/>
+                </a:solidFill>
+              </a:defRPr>
+            </a:pPr>
+            <a:r>
+              <a:t>• </a:t>
+            </a:r>
+          </a:p>
+          <a:p>
+            <a:pPr>
+              <a:spcAft>
+                <a:spcPts val="300"/>
+              </a:spcAft>
+              <a:defRPr sz="1050">
+                <a:solidFill>
+                  <a:srgbClr val="F8FAFC"/>
+                </a:solidFill>
+              </a:defRPr>
+            </a:pPr>
+            <a:r>
+              <a:t>• 📹 demo/studytrack_full_tour.mp4</a:t>
+            </a:r>
+          </a:p>
+          <a:p>
+            <a:pPr>
+              <a:spcAft>
+                <a:spcPts val="300"/>
+              </a:spcAft>
+              <a:defRPr sz="1050">
+                <a:solidFill>
+                  <a:srgbClr val="F8FAFC"/>
+                </a:solidFill>
+              </a:defRPr>
+            </a:pPr>
+            <a:r>
+              <a:t>•    • Broadcast-grade 720p HD MP4 video recording (18.5 MB)</a:t>
             </a:r>
           </a:p>
           <a:p>
